--- a/a7/build/out/u3/A7 3.03  Slides.pptx
+++ b/a7/build/out/u3/A7 3.03  Slides.pptx
@@ -7586,7 +7586,7 @@
         <p:spPr>
           <a:xfrm>
             <a:off x="1874519" y="1804415"/>
-            <a:ext cx="3395979" cy="457200"/>
+            <a:ext cx="3551936" cy="457200"/>
           </a:xfrm>
           <a:prstGeom prst="rect">
             <a:avLst/>
@@ -7628,7 +7628,7 @@
         </p:blipFill>
         <p:spPr>
           <a:xfrm>
-            <a:off x="5133340" y="1783080"/>
+            <a:off x="5289296" y="1783080"/>
             <a:ext cx="329184" cy="499871"/>
           </a:xfrm>
           <a:prstGeom prst="rect">
@@ -7645,7 +7645,7 @@
         <p:spPr>
           <a:xfrm>
             <a:off x="1874519" y="2461260"/>
-            <a:ext cx="1351279" cy="457200"/>
+            <a:ext cx="1425448" cy="457200"/>
           </a:xfrm>
           <a:prstGeom prst="rect">
             <a:avLst/>
@@ -7687,7 +7687,7 @@
         </p:blipFill>
         <p:spPr>
           <a:xfrm>
-            <a:off x="3088639" y="2485644"/>
+            <a:off x="3162808" y="2485644"/>
             <a:ext cx="688848" cy="408432"/>
           </a:xfrm>
           <a:prstGeom prst="rect">
@@ -7703,8 +7703,8 @@
         </p:nvSpPr>
         <p:spPr>
           <a:xfrm>
-            <a:off x="3777487" y="2461260"/>
-            <a:ext cx="3249929" cy="457200"/>
+            <a:off x="3851655" y="2461260"/>
+            <a:ext cx="3400044" cy="457200"/>
           </a:xfrm>
           <a:prstGeom prst="rect">
             <a:avLst/>
@@ -7739,7 +7739,7 @@
         <p:spPr>
           <a:xfrm>
             <a:off x="1874519" y="3073908"/>
-            <a:ext cx="1935480" cy="457200"/>
+            <a:ext cx="2033015" cy="457200"/>
           </a:xfrm>
           <a:prstGeom prst="rect">
             <a:avLst/>
@@ -7781,7 +7781,7 @@
         </p:blipFill>
         <p:spPr>
           <a:xfrm>
-            <a:off x="3672840" y="3159252"/>
+            <a:off x="3770375" y="3159252"/>
             <a:ext cx="1658112" cy="286512"/>
           </a:xfrm>
           <a:prstGeom prst="rect">
@@ -7798,7 +7798,7 @@
         <p:spPr>
           <a:xfrm>
             <a:off x="1874519" y="3686556"/>
-            <a:ext cx="2373630" cy="457200"/>
+            <a:ext cx="2488692" cy="457200"/>
           </a:xfrm>
           <a:prstGeom prst="rect">
             <a:avLst/>
@@ -7840,7 +7840,7 @@
         </p:blipFill>
         <p:spPr>
           <a:xfrm>
-            <a:off x="4110990" y="3770376"/>
+            <a:off x="4226051" y="3770376"/>
             <a:ext cx="1112520" cy="289560"/>
           </a:xfrm>
           <a:prstGeom prst="rect">
@@ -12637,7 +12637,7 @@
         <p:spPr>
           <a:xfrm>
             <a:off x="1874519" y="1804415"/>
-            <a:ext cx="3395979" cy="457200"/>
+            <a:ext cx="3551936" cy="457200"/>
           </a:xfrm>
           <a:prstGeom prst="rect">
             <a:avLst/>
@@ -12679,7 +12679,7 @@
         </p:blipFill>
         <p:spPr>
           <a:xfrm>
-            <a:off x="5133340" y="1783080"/>
+            <a:off x="5289296" y="1783080"/>
             <a:ext cx="329184" cy="499871"/>
           </a:xfrm>
           <a:prstGeom prst="rect">
@@ -12695,8 +12695,8 @@
         </p:nvSpPr>
         <p:spPr>
           <a:xfrm>
-            <a:off x="6011163" y="1760220"/>
-            <a:ext cx="621030" cy="457200"/>
+            <a:off x="6167120" y="1760220"/>
+            <a:ext cx="718566" cy="457200"/>
           </a:xfrm>
           <a:prstGeom prst="rect">
             <a:avLst/>
@@ -12731,7 +12731,7 @@
         <p:spPr>
           <a:xfrm>
             <a:off x="1874519" y="2461260"/>
-            <a:ext cx="1351279" cy="457200"/>
+            <a:ext cx="1425448" cy="457200"/>
           </a:xfrm>
           <a:prstGeom prst="rect">
             <a:avLst/>
@@ -12773,7 +12773,7 @@
         </p:blipFill>
         <p:spPr>
           <a:xfrm>
-            <a:off x="3088639" y="2485644"/>
+            <a:off x="3162808" y="2485644"/>
             <a:ext cx="688848" cy="408432"/>
           </a:xfrm>
           <a:prstGeom prst="rect">
@@ -12789,8 +12789,8 @@
         </p:nvSpPr>
         <p:spPr>
           <a:xfrm>
-            <a:off x="3777487" y="2461260"/>
-            <a:ext cx="3249929" cy="457200"/>
+            <a:off x="3851655" y="2461260"/>
+            <a:ext cx="3400044" cy="457200"/>
           </a:xfrm>
           <a:prstGeom prst="rect">
             <a:avLst/>
@@ -12824,8 +12824,8 @@
         </p:nvSpPr>
         <p:spPr>
           <a:xfrm>
-            <a:off x="7438897" y="2461260"/>
-            <a:ext cx="328929" cy="457200"/>
+            <a:off x="7663180" y="2461260"/>
+            <a:ext cx="379729" cy="457200"/>
           </a:xfrm>
           <a:prstGeom prst="rect">
             <a:avLst/>
@@ -12860,7 +12860,7 @@
         <p:spPr>
           <a:xfrm>
             <a:off x="1874519" y="3073908"/>
-            <a:ext cx="1935480" cy="457200"/>
+            <a:ext cx="2033015" cy="457200"/>
           </a:xfrm>
           <a:prstGeom prst="rect">
             <a:avLst/>
@@ -12902,7 +12902,7 @@
         </p:blipFill>
         <p:spPr>
           <a:xfrm>
-            <a:off x="3672840" y="3159252"/>
+            <a:off x="3770375" y="3159252"/>
             <a:ext cx="1658112" cy="286512"/>
           </a:xfrm>
           <a:prstGeom prst="rect">
@@ -12918,8 +12918,8 @@
         </p:nvSpPr>
         <p:spPr>
           <a:xfrm>
-            <a:off x="5879592" y="3073908"/>
-            <a:ext cx="913130" cy="457200"/>
+            <a:off x="5977128" y="3073908"/>
+            <a:ext cx="1057402" cy="457200"/>
           </a:xfrm>
           <a:prstGeom prst="rect">
             <a:avLst/>
@@ -12954,7 +12954,7 @@
         <p:spPr>
           <a:xfrm>
             <a:off x="1874519" y="3686556"/>
-            <a:ext cx="2373630" cy="457200"/>
+            <a:ext cx="2488692" cy="457200"/>
           </a:xfrm>
           <a:prstGeom prst="rect">
             <a:avLst/>
@@ -12996,7 +12996,7 @@
         </p:blipFill>
         <p:spPr>
           <a:xfrm>
-            <a:off x="4110990" y="3770376"/>
+            <a:off x="4226051" y="3770376"/>
             <a:ext cx="1112520" cy="289560"/>
           </a:xfrm>
           <a:prstGeom prst="rect">
@@ -13012,8 +13012,8 @@
         </p:nvSpPr>
         <p:spPr>
           <a:xfrm>
-            <a:off x="5772149" y="3686556"/>
-            <a:ext cx="474979" cy="457200"/>
+            <a:off x="5887211" y="3686556"/>
+            <a:ext cx="549148" cy="457200"/>
           </a:xfrm>
           <a:prstGeom prst="rect">
             <a:avLst/>
@@ -13685,8 +13685,8 @@
         </p:nvSpPr>
         <p:spPr>
           <a:xfrm>
-            <a:off x="1257300" y="2264664"/>
-            <a:ext cx="2824479" cy="457200"/>
+            <a:off x="1097280" y="2264664"/>
+            <a:ext cx="2957576" cy="457200"/>
           </a:xfrm>
           <a:prstGeom prst="rect">
             <a:avLst/>
@@ -13728,7 +13728,7 @@
         </p:blipFill>
         <p:spPr>
           <a:xfrm>
-            <a:off x="3944620" y="2194560"/>
+            <a:off x="3917696" y="2194560"/>
             <a:ext cx="1987296" cy="597408"/>
           </a:xfrm>
           <a:prstGeom prst="rect">
@@ -13744,8 +13744,8 @@
         </p:nvSpPr>
         <p:spPr>
           <a:xfrm>
-            <a:off x="5931916" y="2264664"/>
-            <a:ext cx="3319779" cy="457200"/>
+            <a:off x="5904992" y="2264664"/>
+            <a:ext cx="3472688" cy="457200"/>
           </a:xfrm>
           <a:prstGeom prst="rect">
             <a:avLst/>
@@ -13787,7 +13787,7 @@
         </p:blipFill>
         <p:spPr>
           <a:xfrm>
-            <a:off x="9114535" y="2194560"/>
+            <a:off x="9240520" y="2194560"/>
             <a:ext cx="1578864" cy="597408"/>
           </a:xfrm>
           <a:prstGeom prst="rect">
@@ -13803,8 +13803,8 @@
         </p:nvSpPr>
         <p:spPr>
           <a:xfrm>
-            <a:off x="10693399" y="2264664"/>
-            <a:ext cx="347980" cy="457200"/>
+            <a:off x="10819384" y="2264664"/>
+            <a:ext cx="382016" cy="457200"/>
           </a:xfrm>
           <a:prstGeom prst="rect">
             <a:avLst/>
@@ -14206,8 +14206,8 @@
         </p:nvSpPr>
         <p:spPr>
           <a:xfrm>
-            <a:off x="1257300" y="2173224"/>
-            <a:ext cx="2824479" cy="457200"/>
+            <a:off x="1097280" y="2173224"/>
+            <a:ext cx="2957576" cy="457200"/>
           </a:xfrm>
           <a:prstGeom prst="rect">
             <a:avLst/>
@@ -14249,7 +14249,7 @@
         </p:blipFill>
         <p:spPr>
           <a:xfrm>
-            <a:off x="3944620" y="2103120"/>
+            <a:off x="3917696" y="2103120"/>
             <a:ext cx="1987296" cy="597408"/>
           </a:xfrm>
           <a:prstGeom prst="rect">
@@ -14265,8 +14265,8 @@
         </p:nvSpPr>
         <p:spPr>
           <a:xfrm>
-            <a:off x="5931916" y="2173224"/>
-            <a:ext cx="3319779" cy="457200"/>
+            <a:off x="5904992" y="2173224"/>
+            <a:ext cx="3472688" cy="457200"/>
           </a:xfrm>
           <a:prstGeom prst="rect">
             <a:avLst/>
@@ -14308,7 +14308,7 @@
         </p:blipFill>
         <p:spPr>
           <a:xfrm>
-            <a:off x="9114535" y="2103120"/>
+            <a:off x="9240520" y="2103120"/>
             <a:ext cx="1578864" cy="597408"/>
           </a:xfrm>
           <a:prstGeom prst="rect">
@@ -14324,8 +14324,8 @@
         </p:nvSpPr>
         <p:spPr>
           <a:xfrm>
-            <a:off x="10693399" y="2173224"/>
-            <a:ext cx="347980" cy="457200"/>
+            <a:off x="10819384" y="2173224"/>
+            <a:ext cx="382016" cy="457200"/>
           </a:xfrm>
           <a:prstGeom prst="rect">
             <a:avLst/>
@@ -17393,8 +17393,8 @@
         </p:nvSpPr>
         <p:spPr>
           <a:xfrm>
-            <a:off x="3441700" y="2410968"/>
-            <a:ext cx="1833880" cy="457200"/>
+            <a:off x="3394964" y="2410968"/>
+            <a:ext cx="1927352" cy="457200"/>
           </a:xfrm>
           <a:prstGeom prst="rect">
             <a:avLst/>
@@ -17436,7 +17436,7 @@
         </p:blipFill>
         <p:spPr>
           <a:xfrm>
-            <a:off x="5138420" y="2340864"/>
+            <a:off x="5185156" y="2340864"/>
             <a:ext cx="3581400" cy="597408"/>
           </a:xfrm>
           <a:prstGeom prst="rect">
@@ -17452,8 +17452,8 @@
         </p:nvSpPr>
         <p:spPr>
           <a:xfrm>
-            <a:off x="3133851" y="3334512"/>
-            <a:ext cx="1833880" cy="457200"/>
+            <a:off x="3087115" y="3334512"/>
+            <a:ext cx="1927352" cy="457200"/>
           </a:xfrm>
           <a:prstGeom prst="rect">
             <a:avLst/>
@@ -17495,7 +17495,7 @@
         </p:blipFill>
         <p:spPr>
           <a:xfrm>
-            <a:off x="4830572" y="3212592"/>
+            <a:off x="4877308" y="3212592"/>
             <a:ext cx="4197096" cy="701040"/>
           </a:xfrm>
           <a:prstGeom prst="rect">
@@ -18090,7 +18090,7 @@
         <p:spPr>
           <a:xfrm>
             <a:off x="1581912" y="5033771"/>
-            <a:ext cx="5148580" cy="457200"/>
+            <a:ext cx="4615180" cy="457200"/>
           </a:xfrm>
           <a:prstGeom prst="rect">
             <a:avLst/>
@@ -18111,7 +18111,7 @@
                 </a:solidFill>
                 <a:latin typeface="Century Schoolbook"/>
               </a:rPr>
-              <a:t>The laws never cross a + or a −:  </a:t>
+              <a:t>Never across a + or a −:  </a:t>
             </a:r>
           </a:p>
         </p:txBody>
@@ -18132,7 +18132,7 @@
         </p:blipFill>
         <p:spPr>
           <a:xfrm>
-            <a:off x="6593331" y="5084064"/>
+            <a:off x="6059932" y="5084064"/>
             <a:ext cx="3118104" cy="356616"/>
           </a:xfrm>
           <a:prstGeom prst="rect">
@@ -18148,8 +18148,8 @@
         </p:nvSpPr>
         <p:spPr>
           <a:xfrm>
-            <a:off x="9711436" y="5033771"/>
-            <a:ext cx="1059180" cy="457200"/>
+            <a:off x="9178036" y="5033771"/>
+            <a:ext cx="1226820" cy="457200"/>
           </a:xfrm>
           <a:prstGeom prst="rect">
             <a:avLst/>
@@ -18191,7 +18191,7 @@
         </p:blipFill>
         <p:spPr>
           <a:xfrm>
-            <a:off x="10633455" y="5091683"/>
+            <a:off x="10267696" y="5091683"/>
             <a:ext cx="323088" cy="341376"/>
           </a:xfrm>
           <a:prstGeom prst="rect">
@@ -18207,8 +18207,8 @@
         </p:nvSpPr>
         <p:spPr>
           <a:xfrm>
-            <a:off x="10956544" y="5033771"/>
-            <a:ext cx="328929" cy="457200"/>
+            <a:off x="10590784" y="5033771"/>
+            <a:ext cx="379729" cy="457200"/>
           </a:xfrm>
           <a:prstGeom prst="rect">
             <a:avLst/>

--- a/a7/build/out/u3/A7 3.03  Slides.pptx
+++ b/a7/build/out/u3/A7 3.03  Slides.pptx
@@ -38,6 +38,7 @@
     <p:sldId id="286" r:id="rId37"/>
     <p:sldId id="287" r:id="rId38"/>
     <p:sldId id="288" r:id="rId39"/>
+    <p:sldId id="289" r:id="rId40"/>
   </p:sldIdLst>
   <p:sldSz cx="12191969" cy="6858000" type="screen4x3"/>
   <p:notesSz cx="6858000" cy="9144000"/>
@@ -5702,9 +5703,44 @@
           </a:p>
         </p:txBody>
       </p:sp>
+      <p:sp>
+        <p:nvSpPr>
+          <p:cNvPr id="9" name="TextBox 8"/>
+          <p:cNvSpPr txBox="1"/>
+          <p:nvPr/>
+        </p:nvSpPr>
+        <p:spPr>
+          <a:xfrm>
+            <a:off x="1130299" y="2171700"/>
+            <a:ext cx="3816096" cy="457200"/>
+          </a:xfrm>
+          <a:prstGeom prst="rect">
+            <a:avLst/>
+          </a:prstGeom>
+          <a:noFill/>
+        </p:spPr>
+        <p:txBody>
+          <a:bodyPr wrap="none" lIns="45720" rIns="45720" tIns="18288" bIns="18288" anchor="ctr">
+            <a:spAutoFit/>
+          </a:bodyPr>
+          <a:lstStyle/>
+          <a:p>
+            <a:pPr algn="l"/>
+            <a:r>
+              <a:rPr sz="2600" b="0" i="0">
+                <a:solidFill>
+                  <a:srgbClr val="1A1A1A"/>
+                </a:solidFill>
+                <a:latin typeface="Century Schoolbook"/>
+              </a:rPr>
+              <a:t>A spreadsheet holds  </a:t>
+            </a:r>
+          </a:p>
+        </p:txBody>
+      </p:sp>
       <p:pic>
         <p:nvPicPr>
-          <p:cNvPr id="9" name="Picture 8" descr="847d3e25747644e7.png"/>
+          <p:cNvPr id="10" name="Picture 9" descr="a9a688dcb3598704.png"/>
           <p:cNvPicPr>
             <a:picLocks noChangeAspect="1"/>
           </p:cNvPicPr>
@@ -5718,8 +5754,8 @@
         </p:blipFill>
         <p:spPr>
           <a:xfrm>
-            <a:off x="5652515" y="2194560"/>
-            <a:ext cx="856488" cy="762000"/>
+            <a:off x="4809236" y="2228088"/>
+            <a:ext cx="935736" cy="344424"/>
           </a:xfrm>
           <a:prstGeom prst="rect">
             <a:avLst/>
@@ -5728,7 +5764,171 @@
       </p:pic>
       <p:sp>
         <p:nvSpPr>
-          <p:cNvPr id="10" name="TextBox 9"/>
+          <p:cNvPr id="11" name="TextBox 10"/>
+          <p:cNvSpPr txBox="1"/>
+          <p:nvPr/>
+        </p:nvSpPr>
+        <p:spPr>
+          <a:xfrm>
+            <a:off x="5744972" y="2171700"/>
+            <a:ext cx="2270760" cy="457200"/>
+          </a:xfrm>
+          <a:prstGeom prst="rect">
+            <a:avLst/>
+          </a:prstGeom>
+          <a:noFill/>
+        </p:spPr>
+        <p:txBody>
+          <a:bodyPr wrap="none" lIns="45720" rIns="45720" tIns="18288" bIns="18288" anchor="ctr">
+            <a:spAutoFit/>
+          </a:bodyPr>
+          <a:lstStyle/>
+          <a:p>
+            <a:pPr algn="l"/>
+            <a:r>
+              <a:rPr sz="2600" b="0" i="0">
+                <a:solidFill>
+                  <a:srgbClr val="1A1A1A"/>
+                </a:solidFill>
+                <a:latin typeface="Century Schoolbook"/>
+              </a:rPr>
+              <a:t>  cells in  </a:t>
+            </a:r>
+          </a:p>
+        </p:txBody>
+      </p:sp>
+      <p:pic>
+        <p:nvPicPr>
+          <p:cNvPr id="12" name="Picture 11" descr="2b46a8bae93fb0d7.png"/>
+          <p:cNvPicPr>
+            <a:picLocks noChangeAspect="1"/>
+          </p:cNvPicPr>
+          <p:nvPr/>
+        </p:nvPicPr>
+        <p:blipFill>
+          <a:blip r:embed="rId3"/>
+          <a:stretch>
+            <a:fillRect/>
+          </a:stretch>
+        </p:blipFill>
+        <p:spPr>
+          <a:xfrm>
+            <a:off x="7878572" y="2229612"/>
+            <a:ext cx="332232" cy="341376"/>
+          </a:xfrm>
+          <a:prstGeom prst="rect">
+            <a:avLst/>
+          </a:prstGeom>
+        </p:spPr>
+      </p:pic>
+      <p:sp>
+        <p:nvSpPr>
+          <p:cNvPr id="13" name="TextBox 12"/>
+          <p:cNvSpPr txBox="1"/>
+          <p:nvPr/>
+        </p:nvSpPr>
+        <p:spPr>
+          <a:xfrm>
+            <a:off x="8210804" y="2171700"/>
+            <a:ext cx="2957576" cy="457200"/>
+          </a:xfrm>
+          <a:prstGeom prst="rect">
+            <a:avLst/>
+          </a:prstGeom>
+          <a:noFill/>
+        </p:spPr>
+        <p:txBody>
+          <a:bodyPr wrap="none" lIns="45720" rIns="45720" tIns="18288" bIns="18288" anchor="ctr">
+            <a:spAutoFit/>
+          </a:bodyPr>
+          <a:lstStyle/>
+          <a:p>
+            <a:pPr algn="l"/>
+            <a:r>
+              <a:rPr sz="2600" b="0" i="0">
+                <a:solidFill>
+                  <a:srgbClr val="1A1A1A"/>
+                </a:solidFill>
+                <a:latin typeface="Century Schoolbook"/>
+              </a:rPr>
+              <a:t>  equal columns.</a:t>
+            </a:r>
+          </a:p>
+        </p:txBody>
+      </p:sp>
+      <p:sp>
+        <p:nvSpPr>
+          <p:cNvPr id="14" name="TextBox 13"/>
+          <p:cNvSpPr txBox="1"/>
+          <p:nvPr/>
+        </p:nvSpPr>
+        <p:spPr>
+          <a:xfrm>
+            <a:off x="777240" y="2880360"/>
+            <a:ext cx="10607040" cy="465151"/>
+          </a:xfrm>
+          <a:prstGeom prst="rect">
+            <a:avLst/>
+          </a:prstGeom>
+          <a:noFill/>
+        </p:spPr>
+        <p:txBody>
+          <a:bodyPr wrap="square" lIns="45720" rIns="45720" tIns="18288" bIns="18288" anchor="t">
+            <a:spAutoFit/>
+          </a:bodyPr>
+          <a:lstStyle/>
+          <a:p>
+            <a:pPr algn="ctr"/>
+            <a:r>
+              <a:rPr sz="2600" b="0" i="0">
+                <a:solidFill>
+                  <a:srgbClr val="1A1A1A"/>
+                </a:solidFill>
+                <a:latin typeface="Century Schoolbook"/>
+              </a:rPr>
+              <a:t>The file is 3 megabytes.</a:t>
+            </a:r>
+          </a:p>
+        </p:txBody>
+      </p:sp>
+      <p:sp>
+        <p:nvSpPr>
+          <p:cNvPr id="15" name="TextBox 14"/>
+          <p:cNvSpPr txBox="1"/>
+          <p:nvPr/>
+        </p:nvSpPr>
+        <p:spPr>
+          <a:xfrm>
+            <a:off x="777240" y="3455239"/>
+            <a:ext cx="10607040" cy="465151"/>
+          </a:xfrm>
+          <a:prstGeom prst="rect">
+            <a:avLst/>
+          </a:prstGeom>
+          <a:noFill/>
+        </p:spPr>
+        <p:txBody>
+          <a:bodyPr wrap="square" lIns="45720" rIns="45720" tIns="18288" bIns="18288" anchor="t">
+            <a:spAutoFit/>
+          </a:bodyPr>
+          <a:lstStyle/>
+          <a:p>
+            <a:pPr algn="ctr"/>
+            <a:r>
+              <a:rPr sz="2600" b="0" i="0">
+                <a:solidFill>
+                  <a:srgbClr val="1A1A1A"/>
+                </a:solidFill>
+                <a:latin typeface="Century Schoolbook"/>
+              </a:rPr>
+              <a:t>How many cells are in each column?</a:t>
+            </a:r>
+          </a:p>
+        </p:txBody>
+      </p:sp>
+      <p:sp>
+        <p:nvSpPr>
+          <p:cNvPr id="16" name="TextBox 15"/>
           <p:cNvSpPr txBox="1"/>
           <p:nvPr/>
         </p:nvSpPr>
@@ -5763,7 +5963,7 @@
       </p:sp>
       <p:sp>
         <p:nvSpPr>
-          <p:cNvPr id="11" name="TextBox 10"/>
+          <p:cNvPr id="17" name="TextBox 16"/>
           <p:cNvSpPr txBox="1"/>
           <p:nvPr/>
         </p:nvSpPr>
@@ -6059,9 +6259,44 @@
           </a:p>
         </p:txBody>
       </p:sp>
+      <p:sp>
+        <p:nvSpPr>
+          <p:cNvPr id="9" name="TextBox 8"/>
+          <p:cNvSpPr txBox="1"/>
+          <p:nvPr/>
+        </p:nvSpPr>
+        <p:spPr>
+          <a:xfrm>
+            <a:off x="1130299" y="2080260"/>
+            <a:ext cx="3816096" cy="457200"/>
+          </a:xfrm>
+          <a:prstGeom prst="rect">
+            <a:avLst/>
+          </a:prstGeom>
+          <a:noFill/>
+        </p:spPr>
+        <p:txBody>
+          <a:bodyPr wrap="none" lIns="45720" rIns="45720" tIns="18288" bIns="18288" anchor="ctr">
+            <a:spAutoFit/>
+          </a:bodyPr>
+          <a:lstStyle/>
+          <a:p>
+            <a:pPr algn="l"/>
+            <a:r>
+              <a:rPr sz="2600" b="0" i="0">
+                <a:solidFill>
+                  <a:srgbClr val="1A1A1A"/>
+                </a:solidFill>
+                <a:latin typeface="Century Schoolbook"/>
+              </a:rPr>
+              <a:t>A spreadsheet holds  </a:t>
+            </a:r>
+          </a:p>
+        </p:txBody>
+      </p:sp>
       <p:pic>
         <p:nvPicPr>
-          <p:cNvPr id="9" name="Picture 8" descr="847d3e25747644e7.png"/>
+          <p:cNvPr id="10" name="Picture 9" descr="a9a688dcb3598704.png"/>
           <p:cNvPicPr>
             <a:picLocks noChangeAspect="1"/>
           </p:cNvPicPr>
@@ -6075,8 +6310,8 @@
         </p:blipFill>
         <p:spPr>
           <a:xfrm>
-            <a:off x="5652515" y="2103120"/>
-            <a:ext cx="856488" cy="762000"/>
+            <a:off x="4809236" y="2136648"/>
+            <a:ext cx="935736" cy="344424"/>
           </a:xfrm>
           <a:prstGeom prst="rect">
             <a:avLst/>
@@ -6085,13 +6320,177 @@
       </p:pic>
       <p:sp>
         <p:nvSpPr>
-          <p:cNvPr id="10" name="TextBox 9"/>
-          <p:cNvSpPr txBox="1"/>
-          <p:nvPr/>
-        </p:nvSpPr>
-        <p:spPr>
-          <a:xfrm>
-            <a:off x="1828800" y="3139440"/>
+          <p:cNvPr id="11" name="TextBox 10"/>
+          <p:cNvSpPr txBox="1"/>
+          <p:nvPr/>
+        </p:nvSpPr>
+        <p:spPr>
+          <a:xfrm>
+            <a:off x="5744972" y="2080260"/>
+            <a:ext cx="2270760" cy="457200"/>
+          </a:xfrm>
+          <a:prstGeom prst="rect">
+            <a:avLst/>
+          </a:prstGeom>
+          <a:noFill/>
+        </p:spPr>
+        <p:txBody>
+          <a:bodyPr wrap="none" lIns="45720" rIns="45720" tIns="18288" bIns="18288" anchor="ctr">
+            <a:spAutoFit/>
+          </a:bodyPr>
+          <a:lstStyle/>
+          <a:p>
+            <a:pPr algn="l"/>
+            <a:r>
+              <a:rPr sz="2600" b="0" i="0">
+                <a:solidFill>
+                  <a:srgbClr val="1A1A1A"/>
+                </a:solidFill>
+                <a:latin typeface="Century Schoolbook"/>
+              </a:rPr>
+              <a:t>  cells in  </a:t>
+            </a:r>
+          </a:p>
+        </p:txBody>
+      </p:sp>
+      <p:pic>
+        <p:nvPicPr>
+          <p:cNvPr id="12" name="Picture 11" descr="2b46a8bae93fb0d7.png"/>
+          <p:cNvPicPr>
+            <a:picLocks noChangeAspect="1"/>
+          </p:cNvPicPr>
+          <p:nvPr/>
+        </p:nvPicPr>
+        <p:blipFill>
+          <a:blip r:embed="rId3"/>
+          <a:stretch>
+            <a:fillRect/>
+          </a:stretch>
+        </p:blipFill>
+        <p:spPr>
+          <a:xfrm>
+            <a:off x="7878572" y="2138171"/>
+            <a:ext cx="332232" cy="341376"/>
+          </a:xfrm>
+          <a:prstGeom prst="rect">
+            <a:avLst/>
+          </a:prstGeom>
+        </p:spPr>
+      </p:pic>
+      <p:sp>
+        <p:nvSpPr>
+          <p:cNvPr id="13" name="TextBox 12"/>
+          <p:cNvSpPr txBox="1"/>
+          <p:nvPr/>
+        </p:nvSpPr>
+        <p:spPr>
+          <a:xfrm>
+            <a:off x="8210804" y="2080260"/>
+            <a:ext cx="2957576" cy="457200"/>
+          </a:xfrm>
+          <a:prstGeom prst="rect">
+            <a:avLst/>
+          </a:prstGeom>
+          <a:noFill/>
+        </p:spPr>
+        <p:txBody>
+          <a:bodyPr wrap="none" lIns="45720" rIns="45720" tIns="18288" bIns="18288" anchor="ctr">
+            <a:spAutoFit/>
+          </a:bodyPr>
+          <a:lstStyle/>
+          <a:p>
+            <a:pPr algn="l"/>
+            <a:r>
+              <a:rPr sz="2600" b="0" i="0">
+                <a:solidFill>
+                  <a:srgbClr val="1A1A1A"/>
+                </a:solidFill>
+                <a:latin typeface="Century Schoolbook"/>
+              </a:rPr>
+              <a:t>  equal columns.</a:t>
+            </a:r>
+          </a:p>
+        </p:txBody>
+      </p:sp>
+      <p:sp>
+        <p:nvSpPr>
+          <p:cNvPr id="14" name="TextBox 13"/>
+          <p:cNvSpPr txBox="1"/>
+          <p:nvPr/>
+        </p:nvSpPr>
+        <p:spPr>
+          <a:xfrm>
+            <a:off x="777240" y="2788920"/>
+            <a:ext cx="10607040" cy="465151"/>
+          </a:xfrm>
+          <a:prstGeom prst="rect">
+            <a:avLst/>
+          </a:prstGeom>
+          <a:noFill/>
+        </p:spPr>
+        <p:txBody>
+          <a:bodyPr wrap="square" lIns="45720" rIns="45720" tIns="18288" bIns="18288" anchor="t">
+            <a:spAutoFit/>
+          </a:bodyPr>
+          <a:lstStyle/>
+          <a:p>
+            <a:pPr algn="ctr"/>
+            <a:r>
+              <a:rPr sz="2600" b="0" i="0">
+                <a:solidFill>
+                  <a:srgbClr val="1A1A1A"/>
+                </a:solidFill>
+                <a:latin typeface="Century Schoolbook"/>
+              </a:rPr>
+              <a:t>The file is 3 megabytes.</a:t>
+            </a:r>
+          </a:p>
+        </p:txBody>
+      </p:sp>
+      <p:sp>
+        <p:nvSpPr>
+          <p:cNvPr id="15" name="TextBox 14"/>
+          <p:cNvSpPr txBox="1"/>
+          <p:nvPr/>
+        </p:nvSpPr>
+        <p:spPr>
+          <a:xfrm>
+            <a:off x="777240" y="3363799"/>
+            <a:ext cx="10607040" cy="465151"/>
+          </a:xfrm>
+          <a:prstGeom prst="rect">
+            <a:avLst/>
+          </a:prstGeom>
+          <a:noFill/>
+        </p:spPr>
+        <p:txBody>
+          <a:bodyPr wrap="square" lIns="45720" rIns="45720" tIns="18288" bIns="18288" anchor="t">
+            <a:spAutoFit/>
+          </a:bodyPr>
+          <a:lstStyle/>
+          <a:p>
+            <a:pPr algn="ctr"/>
+            <a:r>
+              <a:rPr sz="2600" b="0" i="0">
+                <a:solidFill>
+                  <a:srgbClr val="1A1A1A"/>
+                </a:solidFill>
+                <a:latin typeface="Century Schoolbook"/>
+              </a:rPr>
+              <a:t>How many cells are in each column?</a:t>
+            </a:r>
+          </a:p>
+        </p:txBody>
+      </p:sp>
+      <p:sp>
+        <p:nvSpPr>
+          <p:cNvPr id="16" name="TextBox 15"/>
+          <p:cNvSpPr txBox="1"/>
+          <p:nvPr/>
+        </p:nvSpPr>
+        <p:spPr>
+          <a:xfrm>
+            <a:off x="1828800" y="3984398"/>
             <a:ext cx="8503920" cy="548640"/>
           </a:xfrm>
           <a:prstGeom prst="rect">
@@ -6165,13 +6564,13 @@
       </p:sp>
       <p:sp>
         <p:nvSpPr>
-          <p:cNvPr id="11" name="TextBox 10"/>
-          <p:cNvSpPr txBox="1"/>
-          <p:nvPr/>
-        </p:nvSpPr>
-        <p:spPr>
-          <a:xfrm>
-            <a:off x="777240" y="4663440"/>
+          <p:cNvPr id="17" name="TextBox 16"/>
+          <p:cNvSpPr txBox="1"/>
+          <p:nvPr/>
+        </p:nvSpPr>
+        <p:spPr>
+          <a:xfrm>
+            <a:off x="777240" y="4715918"/>
             <a:ext cx="10607040" cy="548640"/>
           </a:xfrm>
           <a:prstGeom prst="rect">
@@ -14531,7 +14930,7 @@
                 </a:solidFill>
                 <a:latin typeface="Century Schoolbook"/>
               </a:rPr>
-              <a:t>IXL</a:t>
+              <a:t>Independent Set</a:t>
             </a:r>
           </a:p>
         </p:txBody>
@@ -14636,7 +15035,7 @@
                 </a:solidFill>
                 <a:latin typeface="Century Schoolbook"/>
               </a:rPr>
-              <a:t>Last five minutes.</a:t>
+              <a:t>Six questions. On your own, in silence.</a:t>
             </a:r>
           </a:p>
         </p:txBody>
@@ -14754,6 +15153,479 @@
         </p:nvSpPr>
         <p:spPr>
           <a:xfrm>
+            <a:off x="960120" y="2011680"/>
+            <a:ext cx="548640" cy="356616"/>
+          </a:xfrm>
+          <a:prstGeom prst="rect">
+            <a:avLst/>
+          </a:prstGeom>
+          <a:noFill/>
+        </p:spPr>
+        <p:txBody>
+          <a:bodyPr wrap="square" lIns="45720" rIns="45720" tIns="18288" bIns="18288" anchor="t">
+            <a:spAutoFit/>
+          </a:bodyPr>
+          <a:lstStyle/>
+          <a:p>
+            <a:pPr algn="l"/>
+            <a:r>
+              <a:rPr sz="2100" b="1" i="0">
+                <a:solidFill>
+                  <a:srgbClr val="0B5394"/>
+                </a:solidFill>
+                <a:latin typeface="Century Schoolbook"/>
+              </a:rPr>
+              <a:t>1.</a:t>
+            </a:r>
+          </a:p>
+        </p:txBody>
+      </p:sp>
+      <p:sp>
+        <p:nvSpPr>
+          <p:cNvPr id="10" name="TextBox 9"/>
+          <p:cNvSpPr txBox="1"/>
+          <p:nvPr/>
+        </p:nvSpPr>
+        <p:spPr>
+          <a:xfrm>
+            <a:off x="1554480" y="2011680"/>
+            <a:ext cx="9829800" cy="411480"/>
+          </a:xfrm>
+          <a:prstGeom prst="rect">
+            <a:avLst/>
+          </a:prstGeom>
+          <a:noFill/>
+        </p:spPr>
+        <p:txBody>
+          <a:bodyPr wrap="square" lIns="45720" rIns="45720" tIns="18288" bIns="18288" anchor="t">
+            <a:spAutoFit/>
+          </a:bodyPr>
+          <a:lstStyle/>
+          <a:p>
+            <a:pPr algn="l"/>
+            <a:r>
+              <a:rPr sz="2100" b="0" i="0">
+                <a:solidFill>
+                  <a:srgbClr val="1A1A1A"/>
+                </a:solidFill>
+                <a:latin typeface="Century Schoolbook"/>
+              </a:rPr>
+              <a:t>Six questions. Work down the page.</a:t>
+            </a:r>
+          </a:p>
+        </p:txBody>
+      </p:sp>
+      <p:sp>
+        <p:nvSpPr>
+          <p:cNvPr id="11" name="TextBox 10"/>
+          <p:cNvSpPr txBox="1"/>
+          <p:nvPr/>
+        </p:nvSpPr>
+        <p:spPr>
+          <a:xfrm>
+            <a:off x="960120" y="2551176"/>
+            <a:ext cx="548640" cy="356616"/>
+          </a:xfrm>
+          <a:prstGeom prst="rect">
+            <a:avLst/>
+          </a:prstGeom>
+          <a:noFill/>
+        </p:spPr>
+        <p:txBody>
+          <a:bodyPr wrap="square" lIns="45720" rIns="45720" tIns="18288" bIns="18288" anchor="t">
+            <a:spAutoFit/>
+          </a:bodyPr>
+          <a:lstStyle/>
+          <a:p>
+            <a:pPr algn="l"/>
+            <a:r>
+              <a:rPr sz="2100" b="1" i="0">
+                <a:solidFill>
+                  <a:srgbClr val="0B5394"/>
+                </a:solidFill>
+                <a:latin typeface="Century Schoolbook"/>
+              </a:rPr>
+              <a:t>2.</a:t>
+            </a:r>
+          </a:p>
+        </p:txBody>
+      </p:sp>
+      <p:sp>
+        <p:nvSpPr>
+          <p:cNvPr id="12" name="TextBox 11"/>
+          <p:cNvSpPr txBox="1"/>
+          <p:nvPr/>
+        </p:nvSpPr>
+        <p:spPr>
+          <a:xfrm>
+            <a:off x="1554480" y="2551176"/>
+            <a:ext cx="9829800" cy="411480"/>
+          </a:xfrm>
+          <a:prstGeom prst="rect">
+            <a:avLst/>
+          </a:prstGeom>
+          <a:noFill/>
+        </p:spPr>
+        <p:txBody>
+          <a:bodyPr wrap="square" lIns="45720" rIns="45720" tIns="18288" bIns="18288" anchor="t">
+            <a:spAutoFit/>
+          </a:bodyPr>
+          <a:lstStyle/>
+          <a:p>
+            <a:pPr algn="l"/>
+            <a:r>
+              <a:rPr sz="2100" b="0" i="0">
+                <a:solidFill>
+                  <a:srgbClr val="1A1A1A"/>
+                </a:solidFill>
+                <a:latin typeface="Century Schoolbook"/>
+              </a:rPr>
+              <a:t>Show the step that does the work, not just the answer.</a:t>
+            </a:r>
+          </a:p>
+        </p:txBody>
+      </p:sp>
+      <p:sp>
+        <p:nvSpPr>
+          <p:cNvPr id="13" name="TextBox 12"/>
+          <p:cNvSpPr txBox="1"/>
+          <p:nvPr/>
+        </p:nvSpPr>
+        <p:spPr>
+          <a:xfrm>
+            <a:off x="960120" y="3090672"/>
+            <a:ext cx="548640" cy="356616"/>
+          </a:xfrm>
+          <a:prstGeom prst="rect">
+            <a:avLst/>
+          </a:prstGeom>
+          <a:noFill/>
+        </p:spPr>
+        <p:txBody>
+          <a:bodyPr wrap="square" lIns="45720" rIns="45720" tIns="18288" bIns="18288" anchor="t">
+            <a:spAutoFit/>
+          </a:bodyPr>
+          <a:lstStyle/>
+          <a:p>
+            <a:pPr algn="l"/>
+            <a:r>
+              <a:rPr sz="2100" b="1" i="0">
+                <a:solidFill>
+                  <a:srgbClr val="0B5394"/>
+                </a:solidFill>
+                <a:latin typeface="Century Schoolbook"/>
+              </a:rPr>
+              <a:t>3.</a:t>
+            </a:r>
+          </a:p>
+        </p:txBody>
+      </p:sp>
+      <p:sp>
+        <p:nvSpPr>
+          <p:cNvPr id="14" name="TextBox 13"/>
+          <p:cNvSpPr txBox="1"/>
+          <p:nvPr/>
+        </p:nvSpPr>
+        <p:spPr>
+          <a:xfrm>
+            <a:off x="1554480" y="3090672"/>
+            <a:ext cx="9829800" cy="411480"/>
+          </a:xfrm>
+          <a:prstGeom prst="rect">
+            <a:avLst/>
+          </a:prstGeom>
+          <a:noFill/>
+        </p:spPr>
+        <p:txBody>
+          <a:bodyPr wrap="square" lIns="45720" rIns="45720" tIns="18288" bIns="18288" anchor="t">
+            <a:spAutoFit/>
+          </a:bodyPr>
+          <a:lstStyle/>
+          <a:p>
+            <a:pPr algn="l"/>
+            <a:r>
+              <a:rPr sz="2100" b="0" i="0">
+                <a:solidFill>
+                  <a:srgbClr val="1A1A1A"/>
+                </a:solidFill>
+                <a:latin typeface="Century Schoolbook"/>
+              </a:rPr>
+              <a:t>Silence until the six minutes are up.</a:t>
+            </a:r>
+          </a:p>
+        </p:txBody>
+      </p:sp>
+    </p:spTree>
+  </p:cSld>
+  <p:clrMapOvr>
+    <a:masterClrMapping/>
+  </p:clrMapOvr>
+</p:sld>
+</file>
+
+<file path=ppt/slides/slide34.xml><?xml version="1.0" encoding="utf-8"?>
+<p:sld xmlns:a="http://schemas.openxmlformats.org/drawingml/2006/main" xmlns:p="http://schemas.openxmlformats.org/presentationml/2006/main" xmlns:r="http://schemas.openxmlformats.org/officeDocument/2006/relationships">
+  <p:cSld>
+    <p:spTree>
+      <p:nvGrpSpPr>
+        <p:cNvPr id="1" name=""/>
+        <p:cNvGrpSpPr/>
+        <p:nvPr/>
+      </p:nvGrpSpPr>
+      <p:grpSpPr/>
+      <p:sp>
+        <p:nvSpPr>
+          <p:cNvPr id="2" name="TextBox 1"/>
+          <p:cNvSpPr txBox="1"/>
+          <p:nvPr/>
+        </p:nvSpPr>
+        <p:spPr>
+          <a:xfrm>
+            <a:off x="777240" y="365760"/>
+            <a:ext cx="10607040" cy="640080"/>
+          </a:xfrm>
+          <a:prstGeom prst="rect">
+            <a:avLst/>
+          </a:prstGeom>
+          <a:noFill/>
+        </p:spPr>
+        <p:txBody>
+          <a:bodyPr wrap="square" lIns="45720" rIns="45720" tIns="18288" bIns="18288" anchor="t">
+            <a:spAutoFit/>
+          </a:bodyPr>
+          <a:lstStyle/>
+          <a:p>
+            <a:pPr algn="l"/>
+            <a:r>
+              <a:rPr sz="3600" b="1" i="0">
+                <a:solidFill>
+                  <a:srgbClr val="1A1A1A"/>
+                </a:solidFill>
+                <a:latin typeface="Century Schoolbook"/>
+              </a:rPr>
+              <a:t>IXL</a:t>
+            </a:r>
+          </a:p>
+        </p:txBody>
+      </p:sp>
+      <p:cxnSp>
+        <p:nvCxnSpPr>
+          <p:cNvPr id="3" name="Connector 2"/>
+          <p:cNvCxnSpPr/>
+          <p:nvPr/>
+        </p:nvCxnSpPr>
+        <p:spPr>
+          <a:xfrm>
+            <a:off x="777240" y="1097280"/>
+            <a:ext cx="10607040" cy="0"/>
+          </a:xfrm>
+          <a:prstGeom prst="line">
+            <a:avLst/>
+          </a:prstGeom>
+          <a:ln w="19050">
+            <a:solidFill>
+              <a:srgbClr val="1A1A1A"/>
+            </a:solidFill>
+          </a:ln>
+        </p:spPr>
+        <p:style>
+          <a:lnRef idx="2">
+            <a:schemeClr val="accent1"/>
+          </a:lnRef>
+          <a:fillRef idx="0">
+            <a:schemeClr val="accent1"/>
+          </a:fillRef>
+          <a:effectRef idx="1">
+            <a:schemeClr val="accent1"/>
+          </a:effectRef>
+          <a:fontRef idx="minor">
+            <a:schemeClr val="tx1"/>
+          </a:fontRef>
+        </p:style>
+      </p:cxnSp>
+      <p:cxnSp>
+        <p:nvCxnSpPr>
+          <p:cNvPr id="4" name="Connector 3"/>
+          <p:cNvCxnSpPr/>
+          <p:nvPr/>
+        </p:nvCxnSpPr>
+        <p:spPr>
+          <a:xfrm>
+            <a:off x="777240" y="1179576"/>
+            <a:ext cx="10607040" cy="0"/>
+          </a:xfrm>
+          <a:prstGeom prst="line">
+            <a:avLst/>
+          </a:prstGeom>
+          <a:ln w="9525">
+            <a:solidFill>
+              <a:srgbClr val="1A1A1A"/>
+            </a:solidFill>
+          </a:ln>
+        </p:spPr>
+        <p:style>
+          <a:lnRef idx="2">
+            <a:schemeClr val="accent1"/>
+          </a:lnRef>
+          <a:fillRef idx="0">
+            <a:schemeClr val="accent1"/>
+          </a:fillRef>
+          <a:effectRef idx="1">
+            <a:schemeClr val="accent1"/>
+          </a:effectRef>
+          <a:fontRef idx="minor">
+            <a:schemeClr val="tx1"/>
+          </a:fontRef>
+        </p:style>
+      </p:cxnSp>
+      <p:sp>
+        <p:nvSpPr>
+          <p:cNvPr id="5" name="TextBox 4"/>
+          <p:cNvSpPr txBox="1"/>
+          <p:nvPr/>
+        </p:nvSpPr>
+        <p:spPr>
+          <a:xfrm>
+            <a:off x="777240" y="1261872"/>
+            <a:ext cx="10607040" cy="310896"/>
+          </a:xfrm>
+          <a:prstGeom prst="rect">
+            <a:avLst/>
+          </a:prstGeom>
+          <a:noFill/>
+        </p:spPr>
+        <p:txBody>
+          <a:bodyPr wrap="square" lIns="45720" rIns="45720" tIns="18288" bIns="18288" anchor="t">
+            <a:spAutoFit/>
+          </a:bodyPr>
+          <a:lstStyle/>
+          <a:p>
+            <a:pPr algn="l"/>
+            <a:r>
+              <a:rPr sz="1700" b="0" i="1">
+                <a:solidFill>
+                  <a:srgbClr val="6B6B6B"/>
+                </a:solidFill>
+                <a:latin typeface="Century Schoolbook"/>
+              </a:rPr>
+              <a:t>Last five minutes.</a:t>
+            </a:r>
+          </a:p>
+        </p:txBody>
+      </p:sp>
+      <p:cxnSp>
+        <p:nvCxnSpPr>
+          <p:cNvPr id="6" name="Connector 5"/>
+          <p:cNvCxnSpPr/>
+          <p:nvPr/>
+        </p:nvCxnSpPr>
+        <p:spPr>
+          <a:xfrm>
+            <a:off x="777240" y="6199632"/>
+            <a:ext cx="10607040" cy="0"/>
+          </a:xfrm>
+          <a:prstGeom prst="line">
+            <a:avLst/>
+          </a:prstGeom>
+          <a:ln w="9525">
+            <a:solidFill>
+              <a:srgbClr val="6B6B6B"/>
+            </a:solidFill>
+          </a:ln>
+        </p:spPr>
+        <p:style>
+          <a:lnRef idx="2">
+            <a:schemeClr val="accent1"/>
+          </a:lnRef>
+          <a:fillRef idx="0">
+            <a:schemeClr val="accent1"/>
+          </a:fillRef>
+          <a:effectRef idx="1">
+            <a:schemeClr val="accent1"/>
+          </a:effectRef>
+          <a:fontRef idx="minor">
+            <a:schemeClr val="tx1"/>
+          </a:fontRef>
+        </p:style>
+      </p:cxnSp>
+      <p:sp>
+        <p:nvSpPr>
+          <p:cNvPr id="7" name="TextBox 6"/>
+          <p:cNvSpPr txBox="1"/>
+          <p:nvPr/>
+        </p:nvSpPr>
+        <p:spPr>
+          <a:xfrm>
+            <a:off x="777240" y="6272784"/>
+            <a:ext cx="9692640" cy="274320"/>
+          </a:xfrm>
+          <a:prstGeom prst="rect">
+            <a:avLst/>
+          </a:prstGeom>
+          <a:noFill/>
+        </p:spPr>
+        <p:txBody>
+          <a:bodyPr wrap="square" lIns="45720" rIns="45720" tIns="18288" bIns="18288" anchor="t">
+            <a:spAutoFit/>
+          </a:bodyPr>
+          <a:lstStyle/>
+          <a:p>
+            <a:pPr algn="l"/>
+            <a:r>
+              <a:rPr sz="1100" b="0" i="1">
+                <a:solidFill>
+                  <a:srgbClr val="6B6B6B"/>
+                </a:solidFill>
+                <a:latin typeface="Century Schoolbook"/>
+              </a:rPr>
+              <a:t>Grade 7 Accelerated · Unit 3 · Lesson 3 — Exponential Expressions</a:t>
+            </a:r>
+          </a:p>
+        </p:txBody>
+      </p:sp>
+      <p:sp>
+        <p:nvSpPr>
+          <p:cNvPr id="8" name="TextBox 7"/>
+          <p:cNvSpPr txBox="1"/>
+          <p:nvPr/>
+        </p:nvSpPr>
+        <p:spPr>
+          <a:xfrm>
+            <a:off x="10744200" y="6272784"/>
+            <a:ext cx="640080" cy="274320"/>
+          </a:xfrm>
+          <a:prstGeom prst="rect">
+            <a:avLst/>
+          </a:prstGeom>
+          <a:noFill/>
+        </p:spPr>
+        <p:txBody>
+          <a:bodyPr wrap="square" lIns="45720" rIns="45720" tIns="18288" bIns="18288" anchor="t">
+            <a:spAutoFit/>
+          </a:bodyPr>
+          <a:lstStyle/>
+          <a:p>
+            <a:pPr algn="r"/>
+            <a:r>
+              <a:rPr sz="1100" b="0" i="0">
+                <a:solidFill>
+                  <a:srgbClr val="6B6B6B"/>
+                </a:solidFill>
+                <a:latin typeface="Century Schoolbook"/>
+              </a:rPr>
+              <a:t>34</a:t>
+            </a:r>
+          </a:p>
+        </p:txBody>
+      </p:sp>
+      <p:sp>
+        <p:nvSpPr>
+          <p:cNvPr id="9" name="TextBox 8"/>
+          <p:cNvSpPr txBox="1"/>
+          <p:nvPr/>
+        </p:nvSpPr>
+        <p:spPr>
+          <a:xfrm>
             <a:off x="960120" y="1828800"/>
             <a:ext cx="548640" cy="356616"/>
           </a:xfrm>
@@ -14951,7 +15823,7 @@
                 </a:solidFill>
                 <a:latin typeface="Century Schoolbook"/>
               </a:rPr>
-              <a:t>Stop at a SmartScore of 67 on each skill. Whatever you do not finish is tonight's practice.</a:t>
+              <a:t>Every skill listed is required, to a SmartScore of 67. Due at the start of the next class.</a:t>
             </a:r>
           </a:p>
         </p:txBody>
@@ -14986,7 +15858,7 @@
                 </a:solidFill>
                 <a:latin typeface="Century Schoolbook"/>
               </a:rPr>
-              <a:t>Today's skills</a:t>
+              <a:t>Today's skills — all required</a:t>
             </a:r>
           </a:p>
         </p:txBody>

--- a/a7/build/out/u3/A7 3.03  Slides.pptx
+++ b/a7/build/out/u3/A7 3.03  Slides.pptx
@@ -11012,7 +11012,25 @@
                 </a:solidFill>
                 <a:latin typeface="Century Schoolbook"/>
               </a:rPr>
-              <a:t>5</a:t>
+              <a:t>3</a:t>
+            </a:r>
+            <a:r>
+              <a:rPr sz="2400" b="0" i="0">
+                <a:solidFill>
+                  <a:srgbClr val="1A1A1A"/>
+                </a:solidFill>
+                <a:latin typeface="Century Schoolbook"/>
+              </a:rPr>
+              <a:t> · 0.1</a:t>
+            </a:r>
+            <a:r>
+              <a:rPr sz="2400" b="0" i="0" baseline="30000">
+                <a:solidFill>
+                  <a:srgbClr val="1A1A1A"/>
+                </a:solidFill>
+                <a:latin typeface="Century Schoolbook"/>
+              </a:rPr>
+              <a:t>2</a:t>
             </a:r>
           </a:p>
         </p:txBody>
@@ -11599,7 +11617,25 @@
                 </a:solidFill>
                 <a:latin typeface="Century Schoolbook"/>
               </a:rPr>
-              <a:t>5</a:t>
+              <a:t>3</a:t>
+            </a:r>
+            <a:r>
+              <a:rPr sz="2400" b="0" i="0">
+                <a:solidFill>
+                  <a:srgbClr val="1A1A1A"/>
+                </a:solidFill>
+                <a:latin typeface="Century Schoolbook"/>
+              </a:rPr>
+              <a:t> · 0.1</a:t>
+            </a:r>
+            <a:r>
+              <a:rPr sz="2400" b="0" i="0" baseline="30000">
+                <a:solidFill>
+                  <a:srgbClr val="1A1A1A"/>
+                </a:solidFill>
+                <a:latin typeface="Century Schoolbook"/>
+              </a:rPr>
+              <a:t>2</a:t>
             </a:r>
           </a:p>
         </p:txBody>

--- a/a7/build/out/u3/A7 3.03  Slides.pptx
+++ b/a7/build/out/u3/A7 3.03  Slides.pptx
@@ -3817,7 +3817,7 @@
       </p:sp>
       <p:pic>
         <p:nvPicPr>
-          <p:cNvPr id="9" name="Picture 8" descr="47f1530b421c799e.png"/>
+          <p:cNvPr id="9" name="Picture 8" descr="ecdab13571b725e6.png"/>
           <p:cNvPicPr>
             <a:picLocks noChangeAspect="1"/>
           </p:cNvPicPr>
@@ -3831,8 +3831,8 @@
         </p:blipFill>
         <p:spPr>
           <a:xfrm>
-            <a:off x="5652515" y="2194560"/>
-            <a:ext cx="856488" cy="762000"/>
+            <a:off x="5469636" y="2194560"/>
+            <a:ext cx="1222248" cy="1018032"/>
           </a:xfrm>
           <a:prstGeom prst="rect">
             <a:avLst/>
@@ -3847,7 +3847,7 @@
         </p:nvSpPr>
         <p:spPr>
           <a:xfrm>
-            <a:off x="777240" y="3276600"/>
+            <a:off x="777240" y="3532632"/>
             <a:ext cx="10607040" cy="429370"/>
           </a:xfrm>
           <a:prstGeom prst="rect">
@@ -4237,7 +4237,7 @@
       </p:sp>
       <p:pic>
         <p:nvPicPr>
-          <p:cNvPr id="9" name="Picture 8" descr="6f56e679f880434f.png"/>
+          <p:cNvPr id="9" name="Picture 8" descr="30d1cf39c0294a10.png"/>
           <p:cNvPicPr>
             <a:picLocks noChangeAspect="1"/>
           </p:cNvPicPr>
@@ -4251,8 +4251,8 @@
         </p:blipFill>
         <p:spPr>
           <a:xfrm>
-            <a:off x="5151120" y="2103120"/>
-            <a:ext cx="1859280" cy="652272"/>
+            <a:off x="4983479" y="2103120"/>
+            <a:ext cx="2194560" cy="880872"/>
           </a:xfrm>
           <a:prstGeom prst="rect">
             <a:avLst/>
@@ -4267,7 +4267,7 @@
         </p:nvSpPr>
         <p:spPr>
           <a:xfrm>
-            <a:off x="777240" y="3258312"/>
+            <a:off x="777240" y="3486912"/>
             <a:ext cx="10607040" cy="429370"/>
           </a:xfrm>
           <a:prstGeom prst="rect">
@@ -4559,7 +4559,7 @@
       </p:sp>
       <p:pic>
         <p:nvPicPr>
-          <p:cNvPr id="9" name="Picture 8" descr="d9a5fe0063de0340.png"/>
+          <p:cNvPr id="9" name="Picture 8" descr="92edf13bccdb7a7f.png"/>
           <p:cNvPicPr>
             <a:picLocks noChangeAspect="1"/>
           </p:cNvPicPr>
@@ -4574,7 +4574,7 @@
         <p:spPr>
           <a:xfrm>
             <a:off x="1828800" y="1920240"/>
-            <a:ext cx="3810000" cy="652272"/>
+            <a:ext cx="4401312" cy="880872"/>
           </a:xfrm>
           <a:prstGeom prst="rect">
             <a:avLst/>
@@ -4589,8 +4589,8 @@
         </p:nvSpPr>
         <p:spPr>
           <a:xfrm>
-            <a:off x="6096000" y="2017776"/>
-            <a:ext cx="5288279" cy="502920"/>
+            <a:off x="6687312" y="2132076"/>
+            <a:ext cx="4696967" cy="502920"/>
           </a:xfrm>
           <a:prstGeom prst="rect">
             <a:avLst/>
@@ -4618,7 +4618,7 @@
       </p:sp>
       <p:pic>
         <p:nvPicPr>
-          <p:cNvPr id="11" name="Picture 10" descr="b49b9488d8d50380.png"/>
+          <p:cNvPr id="11" name="Picture 10" descr="3f689093a9bbe572.png"/>
           <p:cNvPicPr>
             <a:picLocks noChangeAspect="1"/>
           </p:cNvPicPr>
@@ -4632,8 +4632,8 @@
         </p:blipFill>
         <p:spPr>
           <a:xfrm>
-            <a:off x="1828800" y="2846832"/>
-            <a:ext cx="2529840" cy="530352"/>
+            <a:off x="1828800" y="3075432"/>
+            <a:ext cx="2791968" cy="694944"/>
           </a:xfrm>
           <a:prstGeom prst="rect">
             <a:avLst/>
@@ -4648,8 +4648,8 @@
         </p:nvSpPr>
         <p:spPr>
           <a:xfrm>
-            <a:off x="4815840" y="2883408"/>
-            <a:ext cx="6400800" cy="502920"/>
+            <a:off x="5077967" y="3194304"/>
+            <a:ext cx="6306312" cy="502920"/>
           </a:xfrm>
           <a:prstGeom prst="rect">
             <a:avLst/>
@@ -4691,7 +4691,7 @@
         </p:blipFill>
         <p:spPr>
           <a:xfrm>
-            <a:off x="1828800" y="3651504"/>
+            <a:off x="1828800" y="4044695"/>
             <a:ext cx="2505456" cy="411480"/>
           </a:xfrm>
           <a:prstGeom prst="rect">
@@ -4707,7 +4707,7 @@
         </p:nvSpPr>
         <p:spPr>
           <a:xfrm>
-            <a:off x="4791456" y="3628644"/>
+            <a:off x="4791456" y="4021835"/>
             <a:ext cx="6400800" cy="502920"/>
           </a:xfrm>
           <a:prstGeom prst="rect">
@@ -4742,7 +4742,7 @@
         </p:nvSpPr>
         <p:spPr>
           <a:xfrm>
-            <a:off x="777240" y="4572000"/>
+            <a:off x="777240" y="4913376"/>
             <a:ext cx="10607040" cy="548640"/>
           </a:xfrm>
           <a:prstGeom prst="rect">
@@ -5034,7 +5034,7 @@
       </p:sp>
       <p:pic>
         <p:nvPicPr>
-          <p:cNvPr id="9" name="Picture 8" descr="b15519e3d0cba1a1.png"/>
+          <p:cNvPr id="9" name="Picture 8" descr="274e6fec14c7e780.png"/>
           <p:cNvPicPr>
             <a:picLocks noChangeAspect="1"/>
           </p:cNvPicPr>
@@ -5048,8 +5048,8 @@
         </p:blipFill>
         <p:spPr>
           <a:xfrm>
-            <a:off x="5215128" y="2194560"/>
-            <a:ext cx="1731264" cy="813816"/>
+            <a:off x="5004815" y="2194560"/>
+            <a:ext cx="2151888" cy="1091184"/>
           </a:xfrm>
           <a:prstGeom prst="rect">
             <a:avLst/>
@@ -5321,7 +5321,7 @@
       </p:sp>
       <p:pic>
         <p:nvPicPr>
-          <p:cNvPr id="9" name="Picture 8" descr="b15519e3d0cba1a1.png"/>
+          <p:cNvPr id="9" name="Picture 8" descr="274e6fec14c7e780.png"/>
           <p:cNvPicPr>
             <a:picLocks noChangeAspect="1"/>
           </p:cNvPicPr>
@@ -5335,8 +5335,8 @@
         </p:blipFill>
         <p:spPr>
           <a:xfrm>
-            <a:off x="5215128" y="2194560"/>
-            <a:ext cx="1731264" cy="813816"/>
+            <a:off x="5004815" y="2194560"/>
+            <a:ext cx="2151888" cy="1091184"/>
           </a:xfrm>
           <a:prstGeom prst="rect">
             <a:avLst/>
@@ -5351,7 +5351,7 @@
         </p:nvSpPr>
         <p:spPr>
           <a:xfrm>
-            <a:off x="777240" y="3328416"/>
+            <a:off x="777240" y="3605784"/>
             <a:ext cx="10607040" cy="429370"/>
           </a:xfrm>
           <a:prstGeom prst="rect">
@@ -5711,8 +5711,8 @@
         </p:nvSpPr>
         <p:spPr>
           <a:xfrm>
-            <a:off x="1130299" y="2171700"/>
-            <a:ext cx="3816096" cy="457200"/>
+            <a:off x="1543419" y="2171700"/>
+            <a:ext cx="3658371" cy="457200"/>
           </a:xfrm>
           <a:prstGeom prst="rect">
             <a:avLst/>
@@ -5721,7 +5721,7 @@
         </p:spPr>
         <p:txBody>
           <a:bodyPr wrap="none" lIns="45720" rIns="45720" tIns="18288" bIns="18288" anchor="ctr">
-            <a:spAutoFit/>
+            <a:noAutofit/>
           </a:bodyPr>
           <a:lstStyle/>
           <a:p>
@@ -5754,7 +5754,7 @@
         </p:blipFill>
         <p:spPr>
           <a:xfrm>
-            <a:off x="4809236" y="2228088"/>
+            <a:off x="5064631" y="2228088"/>
             <a:ext cx="935736" cy="344424"/>
           </a:xfrm>
           <a:prstGeom prst="rect">
@@ -5770,8 +5770,8 @@
         </p:nvSpPr>
         <p:spPr>
           <a:xfrm>
-            <a:off x="5744972" y="2171700"/>
-            <a:ext cx="2270760" cy="457200"/>
+            <a:off x="6000367" y="2171700"/>
+            <a:ext cx="1733884" cy="457200"/>
           </a:xfrm>
           <a:prstGeom prst="rect">
             <a:avLst/>
@@ -5780,7 +5780,7 @@
         </p:spPr>
         <p:txBody>
           <a:bodyPr wrap="none" lIns="45720" rIns="45720" tIns="18288" bIns="18288" anchor="ctr">
-            <a:spAutoFit/>
+            <a:noAutofit/>
           </a:bodyPr>
           <a:lstStyle/>
           <a:p>
@@ -5813,7 +5813,7 @@
         </p:blipFill>
         <p:spPr>
           <a:xfrm>
-            <a:off x="7878572" y="2229612"/>
+            <a:off x="7597091" y="2229612"/>
             <a:ext cx="332232" cy="341376"/>
           </a:xfrm>
           <a:prstGeom prst="rect">
@@ -5829,8 +5829,8 @@
         </p:nvSpPr>
         <p:spPr>
           <a:xfrm>
-            <a:off x="8210804" y="2171700"/>
-            <a:ext cx="2957576" cy="457200"/>
+            <a:off x="7929323" y="2171700"/>
+            <a:ext cx="2825936" cy="457200"/>
           </a:xfrm>
           <a:prstGeom prst="rect">
             <a:avLst/>
@@ -5839,7 +5839,7 @@
         </p:spPr>
         <p:txBody>
           <a:bodyPr wrap="none" lIns="45720" rIns="45720" tIns="18288" bIns="18288" anchor="ctr">
-            <a:spAutoFit/>
+            <a:noAutofit/>
           </a:bodyPr>
           <a:lstStyle/>
           <a:p>
@@ -6267,8 +6267,8 @@
         </p:nvSpPr>
         <p:spPr>
           <a:xfrm>
-            <a:off x="1130299" y="2080260"/>
-            <a:ext cx="3816096" cy="457200"/>
+            <a:off x="1543419" y="2080260"/>
+            <a:ext cx="3658371" cy="457200"/>
           </a:xfrm>
           <a:prstGeom prst="rect">
             <a:avLst/>
@@ -6277,7 +6277,7 @@
         </p:spPr>
         <p:txBody>
           <a:bodyPr wrap="none" lIns="45720" rIns="45720" tIns="18288" bIns="18288" anchor="ctr">
-            <a:spAutoFit/>
+            <a:noAutofit/>
           </a:bodyPr>
           <a:lstStyle/>
           <a:p>
@@ -6310,7 +6310,7 @@
         </p:blipFill>
         <p:spPr>
           <a:xfrm>
-            <a:off x="4809236" y="2136648"/>
+            <a:off x="5064631" y="2136648"/>
             <a:ext cx="935736" cy="344424"/>
           </a:xfrm>
           <a:prstGeom prst="rect">
@@ -6326,8 +6326,8 @@
         </p:nvSpPr>
         <p:spPr>
           <a:xfrm>
-            <a:off x="5744972" y="2080260"/>
-            <a:ext cx="2270760" cy="457200"/>
+            <a:off x="6000367" y="2080260"/>
+            <a:ext cx="1733884" cy="457200"/>
           </a:xfrm>
           <a:prstGeom prst="rect">
             <a:avLst/>
@@ -6336,7 +6336,7 @@
         </p:spPr>
         <p:txBody>
           <a:bodyPr wrap="none" lIns="45720" rIns="45720" tIns="18288" bIns="18288" anchor="ctr">
-            <a:spAutoFit/>
+            <a:noAutofit/>
           </a:bodyPr>
           <a:lstStyle/>
           <a:p>
@@ -6369,7 +6369,7 @@
         </p:blipFill>
         <p:spPr>
           <a:xfrm>
-            <a:off x="7878572" y="2138171"/>
+            <a:off x="7597091" y="2138171"/>
             <a:ext cx="332232" cy="341376"/>
           </a:xfrm>
           <a:prstGeom prst="rect">
@@ -6385,8 +6385,8 @@
         </p:nvSpPr>
         <p:spPr>
           <a:xfrm>
-            <a:off x="8210804" y="2080260"/>
-            <a:ext cx="2957576" cy="457200"/>
+            <a:off x="7929323" y="2080260"/>
+            <a:ext cx="2825936" cy="457200"/>
           </a:xfrm>
           <a:prstGeom prst="rect">
             <a:avLst/>
@@ -6395,7 +6395,7 @@
         </p:spPr>
         <p:txBody>
           <a:bodyPr wrap="none" lIns="45720" rIns="45720" tIns="18288" bIns="18288" anchor="ctr">
-            <a:spAutoFit/>
+            <a:noAutofit/>
           </a:bodyPr>
           <a:lstStyle/>
           <a:p>
@@ -7621,7 +7621,7 @@
       </p:sp>
       <p:pic>
         <p:nvPicPr>
-          <p:cNvPr id="9" name="Picture 8" descr="e53d2159c938eb19.png"/>
+          <p:cNvPr id="9" name="Picture 8" descr="32948134bf5e3591.png"/>
           <p:cNvPicPr>
             <a:picLocks noChangeAspect="1"/>
           </p:cNvPicPr>
@@ -7635,8 +7635,8 @@
         </p:blipFill>
         <p:spPr>
           <a:xfrm>
-            <a:off x="5591555" y="2194560"/>
-            <a:ext cx="978408" cy="877824"/>
+            <a:off x="5384291" y="2194560"/>
+            <a:ext cx="1392936" cy="1185672"/>
           </a:xfrm>
           <a:prstGeom prst="rect">
             <a:avLst/>
@@ -7984,8 +7984,8 @@
         </p:nvSpPr>
         <p:spPr>
           <a:xfrm>
-            <a:off x="1874519" y="1804415"/>
-            <a:ext cx="3551936" cy="457200"/>
+            <a:off x="1874519" y="1886712"/>
+            <a:ext cx="3058734" cy="457200"/>
           </a:xfrm>
           <a:prstGeom prst="rect">
             <a:avLst/>
@@ -7994,7 +7994,7 @@
         </p:spPr>
         <p:txBody>
           <a:bodyPr wrap="none" lIns="45720" rIns="45720" tIns="18288" bIns="18288" anchor="ctr">
-            <a:spAutoFit/>
+            <a:noAutofit/>
           </a:bodyPr>
           <a:lstStyle/>
           <a:p>
@@ -8013,7 +8013,7 @@
       </p:sp>
       <p:pic>
         <p:nvPicPr>
-          <p:cNvPr id="10" name="Picture 9" descr="6f9fef4fa1b8d586.png"/>
+          <p:cNvPr id="10" name="Picture 9" descr="0d08d420e081e8bf.png"/>
           <p:cNvPicPr>
             <a:picLocks noChangeAspect="1"/>
           </p:cNvPicPr>
@@ -8027,8 +8027,8 @@
         </p:blipFill>
         <p:spPr>
           <a:xfrm>
-            <a:off x="5289296" y="1783080"/>
-            <a:ext cx="329184" cy="499871"/>
+            <a:off x="4796094" y="1783080"/>
+            <a:ext cx="469392" cy="664464"/>
           </a:xfrm>
           <a:prstGeom prst="rect">
             <a:avLst/>
@@ -8043,8 +8043,8 @@
         </p:nvSpPr>
         <p:spPr>
           <a:xfrm>
-            <a:off x="1874519" y="2461260"/>
-            <a:ext cx="1425448" cy="457200"/>
+            <a:off x="1874519" y="2625852"/>
+            <a:ext cx="1082239" cy="457200"/>
           </a:xfrm>
           <a:prstGeom prst="rect">
             <a:avLst/>
@@ -8053,7 +8053,7 @@
         </p:spPr>
         <p:txBody>
           <a:bodyPr wrap="none" lIns="45720" rIns="45720" tIns="18288" bIns="18288" anchor="ctr">
-            <a:spAutoFit/>
+            <a:noAutofit/>
           </a:bodyPr>
           <a:lstStyle/>
           <a:p>
@@ -8086,7 +8086,7 @@
         </p:blipFill>
         <p:spPr>
           <a:xfrm>
-            <a:off x="3162808" y="2485644"/>
+            <a:off x="2819599" y="2650236"/>
             <a:ext cx="688848" cy="408432"/>
           </a:xfrm>
           <a:prstGeom prst="rect">
@@ -8102,8 +8102,8 @@
         </p:nvSpPr>
         <p:spPr>
           <a:xfrm>
-            <a:off x="3851655" y="2461260"/>
-            <a:ext cx="3400044" cy="457200"/>
+            <a:off x="3508447" y="2625852"/>
+            <a:ext cx="2879837" cy="457200"/>
           </a:xfrm>
           <a:prstGeom prst="rect">
             <a:avLst/>
@@ -8112,7 +8112,7 @@
         </p:spPr>
         <p:txBody>
           <a:bodyPr wrap="none" lIns="45720" rIns="45720" tIns="18288" bIns="18288" anchor="ctr">
-            <a:spAutoFit/>
+            <a:noAutofit/>
           </a:bodyPr>
           <a:lstStyle/>
           <a:p>
@@ -8137,8 +8137,8 @@
         </p:nvSpPr>
         <p:spPr>
           <a:xfrm>
-            <a:off x="1874519" y="3073908"/>
-            <a:ext cx="2033015" cy="457200"/>
+            <a:off x="1874519" y="3238500"/>
+            <a:ext cx="1652008" cy="457200"/>
           </a:xfrm>
           <a:prstGeom prst="rect">
             <a:avLst/>
@@ -8147,7 +8147,7 @@
         </p:spPr>
         <p:txBody>
           <a:bodyPr wrap="none" lIns="45720" rIns="45720" tIns="18288" bIns="18288" anchor="ctr">
-            <a:spAutoFit/>
+            <a:noAutofit/>
           </a:bodyPr>
           <a:lstStyle/>
           <a:p>
@@ -8180,7 +8180,7 @@
         </p:blipFill>
         <p:spPr>
           <a:xfrm>
-            <a:off x="3770375" y="3159252"/>
+            <a:off x="3389368" y="3323844"/>
             <a:ext cx="1658112" cy="286512"/>
           </a:xfrm>
           <a:prstGeom prst="rect">
@@ -8196,8 +8196,8 @@
         </p:nvSpPr>
         <p:spPr>
           <a:xfrm>
-            <a:off x="1874519" y="3686556"/>
-            <a:ext cx="2488692" cy="457200"/>
+            <a:off x="1874519" y="3851148"/>
+            <a:ext cx="2190435" cy="457200"/>
           </a:xfrm>
           <a:prstGeom prst="rect">
             <a:avLst/>
@@ -8206,7 +8206,7 @@
         </p:spPr>
         <p:txBody>
           <a:bodyPr wrap="none" lIns="45720" rIns="45720" tIns="18288" bIns="18288" anchor="ctr">
-            <a:spAutoFit/>
+            <a:noAutofit/>
           </a:bodyPr>
           <a:lstStyle/>
           <a:p>
@@ -8239,7 +8239,7 @@
         </p:blipFill>
         <p:spPr>
           <a:xfrm>
-            <a:off x="4226051" y="3770376"/>
+            <a:off x="3927795" y="3934968"/>
             <a:ext cx="1112520" cy="289560"/>
           </a:xfrm>
           <a:prstGeom prst="rect">
@@ -8512,7 +8512,7 @@
       </p:sp>
       <p:pic>
         <p:nvPicPr>
-          <p:cNvPr id="9" name="Picture 8" descr="e53d2159c938eb19.png"/>
+          <p:cNvPr id="9" name="Picture 8" descr="32948134bf5e3591.png"/>
           <p:cNvPicPr>
             <a:picLocks noChangeAspect="1"/>
           </p:cNvPicPr>
@@ -8526,8 +8526,8 @@
         </p:blipFill>
         <p:spPr>
           <a:xfrm>
-            <a:off x="5591555" y="2103120"/>
-            <a:ext cx="978408" cy="877824"/>
+            <a:off x="5384291" y="2103120"/>
+            <a:ext cx="1392936" cy="1185672"/>
           </a:xfrm>
           <a:prstGeom prst="rect">
             <a:avLst/>
@@ -8542,7 +8542,7 @@
         </p:nvSpPr>
         <p:spPr>
           <a:xfrm>
-            <a:off x="1828800" y="3255263"/>
+            <a:off x="1828800" y="3563112"/>
             <a:ext cx="8503920" cy="548640"/>
           </a:xfrm>
           <a:prstGeom prst="rect">
@@ -8914,7 +8914,7 @@
       </p:sp>
       <p:pic>
         <p:nvPicPr>
-          <p:cNvPr id="9" name="Picture 8" descr="3edc0972034fd833.png"/>
+          <p:cNvPr id="9" name="Picture 8" descr="5b85e638d34eb13f.png"/>
           <p:cNvPicPr>
             <a:picLocks noChangeAspect="1"/>
           </p:cNvPicPr>
@@ -8928,8 +8928,8 @@
         </p:blipFill>
         <p:spPr>
           <a:xfrm>
-            <a:off x="5462015" y="2194560"/>
-            <a:ext cx="1237488" cy="765048"/>
+            <a:off x="5280659" y="2194560"/>
+            <a:ext cx="1600200" cy="1014984"/>
           </a:xfrm>
           <a:prstGeom prst="rect">
             <a:avLst/>
@@ -9271,7 +9271,7 @@
       </p:sp>
       <p:pic>
         <p:nvPicPr>
-          <p:cNvPr id="9" name="Picture 8" descr="3edc0972034fd833.png"/>
+          <p:cNvPr id="9" name="Picture 8" descr="5b85e638d34eb13f.png"/>
           <p:cNvPicPr>
             <a:picLocks noChangeAspect="1"/>
           </p:cNvPicPr>
@@ -9285,8 +9285,8 @@
         </p:blipFill>
         <p:spPr>
           <a:xfrm>
-            <a:off x="5462015" y="2103120"/>
-            <a:ext cx="1237488" cy="765048"/>
+            <a:off x="5280659" y="2103120"/>
+            <a:ext cx="1600200" cy="1014984"/>
           </a:xfrm>
           <a:prstGeom prst="rect">
             <a:avLst/>
@@ -9301,7 +9301,7 @@
         </p:nvSpPr>
         <p:spPr>
           <a:xfrm>
-            <a:off x="1828800" y="3142488"/>
+            <a:off x="1828800" y="3392424"/>
             <a:ext cx="8503920" cy="548640"/>
           </a:xfrm>
           <a:prstGeom prst="rect">
@@ -9646,7 +9646,7 @@
       </p:sp>
       <p:pic>
         <p:nvPicPr>
-          <p:cNvPr id="9" name="Picture 8" descr="3bd8db78875b70ab.png"/>
+          <p:cNvPr id="9" name="Picture 8" descr="85a5d92abe26b906.png"/>
           <p:cNvPicPr>
             <a:picLocks noChangeAspect="1"/>
           </p:cNvPicPr>
@@ -9660,8 +9660,8 @@
         </p:blipFill>
         <p:spPr>
           <a:xfrm>
-            <a:off x="5327904" y="2194560"/>
-            <a:ext cx="1505712" cy="819912"/>
+            <a:off x="5006340" y="2194560"/>
+            <a:ext cx="2148840" cy="1100328"/>
           </a:xfrm>
           <a:prstGeom prst="rect">
             <a:avLst/>
@@ -9676,7 +9676,7 @@
         </p:nvSpPr>
         <p:spPr>
           <a:xfrm>
-            <a:off x="777240" y="3243072"/>
+            <a:off x="777240" y="3523488"/>
             <a:ext cx="10607040" cy="465151"/>
           </a:xfrm>
           <a:prstGeom prst="rect">
@@ -9711,7 +9711,7 @@
         </p:nvSpPr>
         <p:spPr>
           <a:xfrm>
-            <a:off x="1874519" y="3909391"/>
+            <a:off x="1874519" y="4189807"/>
             <a:ext cx="4572000" cy="548640"/>
           </a:xfrm>
           <a:prstGeom prst="rect">
@@ -9755,7 +9755,7 @@
         </p:nvSpPr>
         <p:spPr>
           <a:xfrm>
-            <a:off x="6629400" y="3909391"/>
+            <a:off x="6629400" y="4189807"/>
             <a:ext cx="4572000" cy="548640"/>
           </a:xfrm>
           <a:prstGeom prst="rect">
@@ -9808,7 +9808,7 @@
         </p:nvSpPr>
         <p:spPr>
           <a:xfrm>
-            <a:off x="1874519" y="4595191"/>
+            <a:off x="1874519" y="4875607"/>
             <a:ext cx="4572000" cy="548640"/>
           </a:xfrm>
           <a:prstGeom prst="rect">
@@ -9852,7 +9852,7 @@
         </p:nvSpPr>
         <p:spPr>
           <a:xfrm>
-            <a:off x="6629400" y="4595191"/>
+            <a:off x="6629400" y="4875607"/>
             <a:ext cx="4572000" cy="548640"/>
           </a:xfrm>
           <a:prstGeom prst="rect">
@@ -9896,7 +9896,7 @@
         </p:nvSpPr>
         <p:spPr>
           <a:xfrm>
-            <a:off x="777240" y="5601031"/>
+            <a:off x="777240" y="5687568"/>
             <a:ext cx="10607040" cy="457200"/>
           </a:xfrm>
           <a:prstGeom prst="rect">
@@ -10188,7 +10188,7 @@
       </p:sp>
       <p:pic>
         <p:nvPicPr>
-          <p:cNvPr id="9" name="Picture 8" descr="3bd8db78875b70ab.png"/>
+          <p:cNvPr id="9" name="Picture 8" descr="85a5d92abe26b906.png"/>
           <p:cNvPicPr>
             <a:picLocks noChangeAspect="1"/>
           </p:cNvPicPr>
@@ -10202,8 +10202,8 @@
         </p:blipFill>
         <p:spPr>
           <a:xfrm>
-            <a:off x="5327904" y="2103120"/>
-            <a:ext cx="1505712" cy="819912"/>
+            <a:off x="5006340" y="2103120"/>
+            <a:ext cx="2148840" cy="1100328"/>
           </a:xfrm>
           <a:prstGeom prst="rect">
             <a:avLst/>
@@ -10218,7 +10218,7 @@
         </p:nvSpPr>
         <p:spPr>
           <a:xfrm>
-            <a:off x="777240" y="3151631"/>
+            <a:off x="777240" y="3432047"/>
             <a:ext cx="10607040" cy="465151"/>
           </a:xfrm>
           <a:prstGeom prst="rect">
@@ -10253,7 +10253,7 @@
         </p:nvSpPr>
         <p:spPr>
           <a:xfrm>
-            <a:off x="1874519" y="3817951"/>
+            <a:off x="1874519" y="4098367"/>
             <a:ext cx="4572000" cy="548640"/>
           </a:xfrm>
           <a:prstGeom prst="rect">
@@ -10297,7 +10297,7 @@
         </p:nvSpPr>
         <p:spPr>
           <a:xfrm>
-            <a:off x="6629400" y="3817951"/>
+            <a:off x="6629400" y="4098367"/>
             <a:ext cx="4572000" cy="548640"/>
           </a:xfrm>
           <a:prstGeom prst="rect">
@@ -10350,7 +10350,7 @@
         </p:nvSpPr>
         <p:spPr>
           <a:xfrm>
-            <a:off x="1874519" y="4503751"/>
+            <a:off x="1874519" y="4784167"/>
             <a:ext cx="4572000" cy="548640"/>
           </a:xfrm>
           <a:prstGeom prst="rect">
@@ -10394,7 +10394,7 @@
         </p:nvSpPr>
         <p:spPr>
           <a:xfrm>
-            <a:off x="6629400" y="4503751"/>
+            <a:off x="6629400" y="4784167"/>
             <a:ext cx="4572000" cy="548640"/>
           </a:xfrm>
           <a:prstGeom prst="rect">
@@ -10438,7 +10438,7 @@
         </p:nvSpPr>
         <p:spPr>
           <a:xfrm>
-            <a:off x="777240" y="5509591"/>
+            <a:off x="777240" y="5632704"/>
             <a:ext cx="10607040" cy="548640"/>
           </a:xfrm>
           <a:prstGeom prst="rect">
@@ -10730,7 +10730,7 @@
       </p:sp>
       <p:pic>
         <p:nvPicPr>
-          <p:cNvPr id="9" name="Picture 8" descr="5ae24d51018d0435.png"/>
+          <p:cNvPr id="9" name="Picture 8" descr="36dd69d05a8fa1b0.png"/>
           <p:cNvPicPr>
             <a:picLocks noChangeAspect="1"/>
           </p:cNvPicPr>
@@ -10744,8 +10744,8 @@
         </p:blipFill>
         <p:spPr>
           <a:xfrm>
-            <a:off x="5201411" y="2194560"/>
-            <a:ext cx="1758696" cy="752856"/>
+            <a:off x="5074919" y="2194560"/>
+            <a:ext cx="2011680" cy="1005840"/>
           </a:xfrm>
           <a:prstGeom prst="rect">
             <a:avLst/>
@@ -10760,7 +10760,7 @@
         </p:nvSpPr>
         <p:spPr>
           <a:xfrm>
-            <a:off x="777240" y="3176016"/>
+            <a:off x="777240" y="3429000"/>
             <a:ext cx="10607040" cy="465151"/>
           </a:xfrm>
           <a:prstGeom prst="rect">
@@ -10795,7 +10795,7 @@
         </p:nvSpPr>
         <p:spPr>
           <a:xfrm>
-            <a:off x="1874519" y="3842335"/>
+            <a:off x="1874519" y="4095319"/>
             <a:ext cx="4572000" cy="548640"/>
           </a:xfrm>
           <a:prstGeom prst="rect">
@@ -10848,7 +10848,7 @@
         </p:nvSpPr>
         <p:spPr>
           <a:xfrm>
-            <a:off x="6629400" y="3842335"/>
+            <a:off x="6629400" y="4095319"/>
             <a:ext cx="4572000" cy="548640"/>
           </a:xfrm>
           <a:prstGeom prst="rect">
@@ -10919,7 +10919,7 @@
         </p:nvSpPr>
         <p:spPr>
           <a:xfrm>
-            <a:off x="1874519" y="4528135"/>
+            <a:off x="1874519" y="4781119"/>
             <a:ext cx="4572000" cy="548640"/>
           </a:xfrm>
           <a:prstGeom prst="rect">
@@ -10972,7 +10972,7 @@
         </p:nvSpPr>
         <p:spPr>
           <a:xfrm>
-            <a:off x="6629400" y="4528135"/>
+            <a:off x="6629400" y="4781119"/>
             <a:ext cx="4572000" cy="548640"/>
           </a:xfrm>
           <a:prstGeom prst="rect">
@@ -11043,7 +11043,7 @@
         </p:nvSpPr>
         <p:spPr>
           <a:xfrm>
-            <a:off x="777240" y="5533975"/>
+            <a:off x="777240" y="5687568"/>
             <a:ext cx="10607040" cy="457200"/>
           </a:xfrm>
           <a:prstGeom prst="rect">
@@ -11335,7 +11335,7 @@
       </p:sp>
       <p:pic>
         <p:nvPicPr>
-          <p:cNvPr id="9" name="Picture 8" descr="5ae24d51018d0435.png"/>
+          <p:cNvPr id="9" name="Picture 8" descr="36dd69d05a8fa1b0.png"/>
           <p:cNvPicPr>
             <a:picLocks noChangeAspect="1"/>
           </p:cNvPicPr>
@@ -11349,8 +11349,8 @@
         </p:blipFill>
         <p:spPr>
           <a:xfrm>
-            <a:off x="5201411" y="2103120"/>
-            <a:ext cx="1758696" cy="752856"/>
+            <a:off x="5074919" y="2103120"/>
+            <a:ext cx="2011680" cy="1005840"/>
           </a:xfrm>
           <a:prstGeom prst="rect">
             <a:avLst/>
@@ -11365,7 +11365,7 @@
         </p:nvSpPr>
         <p:spPr>
           <a:xfrm>
-            <a:off x="777240" y="3084575"/>
+            <a:off x="777240" y="3337560"/>
             <a:ext cx="10607040" cy="465151"/>
           </a:xfrm>
           <a:prstGeom prst="rect">
@@ -11400,7 +11400,7 @@
         </p:nvSpPr>
         <p:spPr>
           <a:xfrm>
-            <a:off x="1874519" y="3750895"/>
+            <a:off x="1874519" y="4003879"/>
             <a:ext cx="4572000" cy="548640"/>
           </a:xfrm>
           <a:prstGeom prst="rect">
@@ -11453,7 +11453,7 @@
         </p:nvSpPr>
         <p:spPr>
           <a:xfrm>
-            <a:off x="6629400" y="3750895"/>
+            <a:off x="6629400" y="4003879"/>
             <a:ext cx="4572000" cy="548640"/>
           </a:xfrm>
           <a:prstGeom prst="rect">
@@ -11524,7 +11524,7 @@
         </p:nvSpPr>
         <p:spPr>
           <a:xfrm>
-            <a:off x="1874519" y="4436695"/>
+            <a:off x="1874519" y="4689679"/>
             <a:ext cx="4572000" cy="548640"/>
           </a:xfrm>
           <a:prstGeom prst="rect">
@@ -11577,7 +11577,7 @@
         </p:nvSpPr>
         <p:spPr>
           <a:xfrm>
-            <a:off x="6629400" y="4436695"/>
+            <a:off x="6629400" y="4689679"/>
             <a:ext cx="4572000" cy="548640"/>
           </a:xfrm>
           <a:prstGeom prst="rect">
@@ -11648,7 +11648,7 @@
         </p:nvSpPr>
         <p:spPr>
           <a:xfrm>
-            <a:off x="777240" y="5442535"/>
+            <a:off x="777240" y="5632704"/>
             <a:ext cx="10607040" cy="548640"/>
           </a:xfrm>
           <a:prstGeom prst="rect">
@@ -12708,7 +12708,7 @@
       </p:sp>
       <p:pic>
         <p:nvPicPr>
-          <p:cNvPr id="9" name="Picture 8" descr="61352b83b6387bd1.png"/>
+          <p:cNvPr id="9" name="Picture 8" descr="a2077b17c7711d12.png"/>
           <p:cNvPicPr>
             <a:picLocks noChangeAspect="1"/>
           </p:cNvPicPr>
@@ -12722,8 +12722,8 @@
         </p:blipFill>
         <p:spPr>
           <a:xfrm>
-            <a:off x="5172456" y="2194560"/>
-            <a:ext cx="1816608" cy="880872"/>
+            <a:off x="4783836" y="2194560"/>
+            <a:ext cx="2593848" cy="1188720"/>
           </a:xfrm>
           <a:prstGeom prst="rect">
             <a:avLst/>
@@ -13071,8 +13071,8 @@
         </p:nvSpPr>
         <p:spPr>
           <a:xfrm>
-            <a:off x="1874519" y="1804415"/>
-            <a:ext cx="3551936" cy="457200"/>
+            <a:off x="1874519" y="1886712"/>
+            <a:ext cx="3058734" cy="457200"/>
           </a:xfrm>
           <a:prstGeom prst="rect">
             <a:avLst/>
@@ -13081,7 +13081,7 @@
         </p:spPr>
         <p:txBody>
           <a:bodyPr wrap="none" lIns="45720" rIns="45720" tIns="18288" bIns="18288" anchor="ctr">
-            <a:spAutoFit/>
+            <a:noAutofit/>
           </a:bodyPr>
           <a:lstStyle/>
           <a:p>
@@ -13100,7 +13100,7 @@
       </p:sp>
       <p:pic>
         <p:nvPicPr>
-          <p:cNvPr id="10" name="Picture 9" descr="6f9fef4fa1b8d586.png"/>
+          <p:cNvPr id="10" name="Picture 9" descr="0d08d420e081e8bf.png"/>
           <p:cNvPicPr>
             <a:picLocks noChangeAspect="1"/>
           </p:cNvPicPr>
@@ -13114,8 +13114,8 @@
         </p:blipFill>
         <p:spPr>
           <a:xfrm>
-            <a:off x="5289296" y="1783080"/>
-            <a:ext cx="329184" cy="499871"/>
+            <a:off x="4796094" y="1783080"/>
+            <a:ext cx="469392" cy="664464"/>
           </a:xfrm>
           <a:prstGeom prst="rect">
             <a:avLst/>
@@ -13130,8 +13130,8 @@
         </p:nvSpPr>
         <p:spPr>
           <a:xfrm>
-            <a:off x="6167120" y="1760220"/>
-            <a:ext cx="718566" cy="457200"/>
+            <a:off x="5814126" y="1760220"/>
+            <a:ext cx="743533" cy="457200"/>
           </a:xfrm>
           <a:prstGeom prst="rect">
             <a:avLst/>
@@ -13140,7 +13140,7 @@
         </p:spPr>
         <p:txBody>
           <a:bodyPr wrap="none" lIns="45720" rIns="45720" tIns="18288" bIns="18288" anchor="ctr">
-            <a:spAutoFit/>
+            <a:noAutofit/>
           </a:bodyPr>
           <a:lstStyle/>
           <a:p>
@@ -13165,8 +13165,8 @@
         </p:nvSpPr>
         <p:spPr>
           <a:xfrm>
-            <a:off x="1874519" y="2461260"/>
-            <a:ext cx="1425448" cy="457200"/>
+            <a:off x="1874519" y="2625852"/>
+            <a:ext cx="1082239" cy="457200"/>
           </a:xfrm>
           <a:prstGeom prst="rect">
             <a:avLst/>
@@ -13175,7 +13175,7 @@
         </p:spPr>
         <p:txBody>
           <a:bodyPr wrap="none" lIns="45720" rIns="45720" tIns="18288" bIns="18288" anchor="ctr">
-            <a:spAutoFit/>
+            <a:noAutofit/>
           </a:bodyPr>
           <a:lstStyle/>
           <a:p>
@@ -13208,7 +13208,7 @@
         </p:blipFill>
         <p:spPr>
           <a:xfrm>
-            <a:off x="3162808" y="2485644"/>
+            <a:off x="2819599" y="2650236"/>
             <a:ext cx="688848" cy="408432"/>
           </a:xfrm>
           <a:prstGeom prst="rect">
@@ -13224,8 +13224,8 @@
         </p:nvSpPr>
         <p:spPr>
           <a:xfrm>
-            <a:off x="3851655" y="2461260"/>
-            <a:ext cx="3400044" cy="457200"/>
+            <a:off x="3508447" y="2625852"/>
+            <a:ext cx="2879837" cy="457200"/>
           </a:xfrm>
           <a:prstGeom prst="rect">
             <a:avLst/>
@@ -13234,7 +13234,7 @@
         </p:spPr>
         <p:txBody>
           <a:bodyPr wrap="none" lIns="45720" rIns="45720" tIns="18288" bIns="18288" anchor="ctr">
-            <a:spAutoFit/>
+            <a:noAutofit/>
           </a:bodyPr>
           <a:lstStyle/>
           <a:p>
@@ -13259,8 +13259,8 @@
         </p:nvSpPr>
         <p:spPr>
           <a:xfrm>
-            <a:off x="7663180" y="2461260"/>
-            <a:ext cx="379729" cy="457200"/>
+            <a:off x="6799764" y="2625852"/>
+            <a:ext cx="388052" cy="457200"/>
           </a:xfrm>
           <a:prstGeom prst="rect">
             <a:avLst/>
@@ -13269,7 +13269,7 @@
         </p:spPr>
         <p:txBody>
           <a:bodyPr wrap="none" lIns="45720" rIns="45720" tIns="18288" bIns="18288" anchor="ctr">
-            <a:spAutoFit/>
+            <a:noAutofit/>
           </a:bodyPr>
           <a:lstStyle/>
           <a:p>
@@ -13294,8 +13294,8 @@
         </p:nvSpPr>
         <p:spPr>
           <a:xfrm>
-            <a:off x="1874519" y="3073908"/>
-            <a:ext cx="2033015" cy="457200"/>
+            <a:off x="1874519" y="3238500"/>
+            <a:ext cx="1652008" cy="457200"/>
           </a:xfrm>
           <a:prstGeom prst="rect">
             <a:avLst/>
@@ -13304,7 +13304,7 @@
         </p:spPr>
         <p:txBody>
           <a:bodyPr wrap="none" lIns="45720" rIns="45720" tIns="18288" bIns="18288" anchor="ctr">
-            <a:spAutoFit/>
+            <a:noAutofit/>
           </a:bodyPr>
           <a:lstStyle/>
           <a:p>
@@ -13337,7 +13337,7 @@
         </p:blipFill>
         <p:spPr>
           <a:xfrm>
-            <a:off x="3770375" y="3159252"/>
+            <a:off x="3389368" y="3323844"/>
             <a:ext cx="1658112" cy="286512"/>
           </a:xfrm>
           <a:prstGeom prst="rect">
@@ -13353,8 +13353,8 @@
         </p:nvSpPr>
         <p:spPr>
           <a:xfrm>
-            <a:off x="5977128" y="3073908"/>
-            <a:ext cx="1057402" cy="457200"/>
+            <a:off x="5596120" y="3238500"/>
+            <a:ext cx="942623" cy="457200"/>
           </a:xfrm>
           <a:prstGeom prst="rect">
             <a:avLst/>
@@ -13363,7 +13363,7 @@
         </p:spPr>
         <p:txBody>
           <a:bodyPr wrap="none" lIns="45720" rIns="45720" tIns="18288" bIns="18288" anchor="ctr">
-            <a:spAutoFit/>
+            <a:noAutofit/>
           </a:bodyPr>
           <a:lstStyle/>
           <a:p>
@@ -13388,8 +13388,8 @@
         </p:nvSpPr>
         <p:spPr>
           <a:xfrm>
-            <a:off x="1874519" y="3686556"/>
-            <a:ext cx="2488692" cy="457200"/>
+            <a:off x="1874519" y="3851148"/>
+            <a:ext cx="2190435" cy="457200"/>
           </a:xfrm>
           <a:prstGeom prst="rect">
             <a:avLst/>
@@ -13398,7 +13398,7 @@
         </p:spPr>
         <p:txBody>
           <a:bodyPr wrap="none" lIns="45720" rIns="45720" tIns="18288" bIns="18288" anchor="ctr">
-            <a:spAutoFit/>
+            <a:noAutofit/>
           </a:bodyPr>
           <a:lstStyle/>
           <a:p>
@@ -13431,7 +13431,7 @@
         </p:blipFill>
         <p:spPr>
           <a:xfrm>
-            <a:off x="4226051" y="3770376"/>
+            <a:off x="3927795" y="3934968"/>
             <a:ext cx="1112520" cy="289560"/>
           </a:xfrm>
           <a:prstGeom prst="rect">
@@ -13447,8 +13447,8 @@
         </p:nvSpPr>
         <p:spPr>
           <a:xfrm>
-            <a:off x="5887211" y="3686556"/>
-            <a:ext cx="549148" cy="457200"/>
+            <a:off x="5588955" y="3851148"/>
+            <a:ext cx="565792" cy="457200"/>
           </a:xfrm>
           <a:prstGeom prst="rect">
             <a:avLst/>
@@ -13457,7 +13457,7 @@
         </p:spPr>
         <p:txBody>
           <a:bodyPr wrap="none" lIns="45720" rIns="45720" tIns="18288" bIns="18288" anchor="ctr">
-            <a:spAutoFit/>
+            <a:noAutofit/>
           </a:bodyPr>
           <a:lstStyle/>
           <a:p>
@@ -13739,7 +13739,7 @@
       </p:sp>
       <p:pic>
         <p:nvPicPr>
-          <p:cNvPr id="9" name="Picture 8" descr="61352b83b6387bd1.png"/>
+          <p:cNvPr id="9" name="Picture 8" descr="a2077b17c7711d12.png"/>
           <p:cNvPicPr>
             <a:picLocks noChangeAspect="1"/>
           </p:cNvPicPr>
@@ -13753,8 +13753,8 @@
         </p:blipFill>
         <p:spPr>
           <a:xfrm>
-            <a:off x="5172456" y="2103120"/>
-            <a:ext cx="1816608" cy="880872"/>
+            <a:off x="4783836" y="2103120"/>
+            <a:ext cx="2593848" cy="1188720"/>
           </a:xfrm>
           <a:prstGeom prst="rect">
             <a:avLst/>
@@ -13769,7 +13769,7 @@
         </p:nvSpPr>
         <p:spPr>
           <a:xfrm>
-            <a:off x="1828800" y="3258311"/>
+            <a:off x="1828800" y="3566159"/>
             <a:ext cx="8503920" cy="548640"/>
           </a:xfrm>
           <a:prstGeom prst="rect">
@@ -14120,8 +14120,8 @@
         </p:nvSpPr>
         <p:spPr>
           <a:xfrm>
-            <a:off x="1097280" y="2264664"/>
-            <a:ext cx="2957576" cy="457200"/>
+            <a:off x="1176876" y="2369820"/>
+            <a:ext cx="2867900" cy="457200"/>
           </a:xfrm>
           <a:prstGeom prst="rect">
             <a:avLst/>
@@ -14130,7 +14130,7 @@
         </p:spPr>
         <p:txBody>
           <a:bodyPr wrap="none" lIns="45720" rIns="45720" tIns="18288" bIns="18288" anchor="ctr">
-            <a:spAutoFit/>
+            <a:noAutofit/>
           </a:bodyPr>
           <a:lstStyle/>
           <a:p>
@@ -14149,7 +14149,7 @@
       </p:sp>
       <p:pic>
         <p:nvPicPr>
-          <p:cNvPr id="10" name="Picture 9" descr="e0370a0bf7c70c8e.png"/>
+          <p:cNvPr id="10" name="Picture 9" descr="8510a940fc60582e.png"/>
           <p:cNvPicPr>
             <a:picLocks noChangeAspect="1"/>
           </p:cNvPicPr>
@@ -14163,8 +14163,8 @@
         </p:blipFill>
         <p:spPr>
           <a:xfrm>
-            <a:off x="3917696" y="2194560"/>
-            <a:ext cx="1987296" cy="597408"/>
+            <a:off x="3907616" y="2194560"/>
+            <a:ext cx="2185416" cy="807720"/>
           </a:xfrm>
           <a:prstGeom prst="rect">
             <a:avLst/>
@@ -14179,8 +14179,8 @@
         </p:nvSpPr>
         <p:spPr>
           <a:xfrm>
-            <a:off x="5904992" y="2264664"/>
-            <a:ext cx="3472688" cy="457200"/>
+            <a:off x="6093032" y="2369820"/>
+            <a:ext cx="2925902" cy="457200"/>
           </a:xfrm>
           <a:prstGeom prst="rect">
             <a:avLst/>
@@ -14189,7 +14189,7 @@
         </p:spPr>
         <p:txBody>
           <a:bodyPr wrap="none" lIns="45720" rIns="45720" tIns="18288" bIns="18288" anchor="ctr">
-            <a:spAutoFit/>
+            <a:noAutofit/>
           </a:bodyPr>
           <a:lstStyle/>
           <a:p>
@@ -14208,7 +14208,7 @@
       </p:sp>
       <p:pic>
         <p:nvPicPr>
-          <p:cNvPr id="12" name="Picture 11" descr="94da6c4095d204bb.png"/>
+          <p:cNvPr id="12" name="Picture 11" descr="895c1949fc6ae630.png"/>
           <p:cNvPicPr>
             <a:picLocks noChangeAspect="1"/>
           </p:cNvPicPr>
@@ -14222,8 +14222,8 @@
         </p:blipFill>
         <p:spPr>
           <a:xfrm>
-            <a:off x="9240520" y="2194560"/>
-            <a:ext cx="1578864" cy="597408"/>
+            <a:off x="8881775" y="2194560"/>
+            <a:ext cx="1932432" cy="807720"/>
           </a:xfrm>
           <a:prstGeom prst="rect">
             <a:avLst/>
@@ -14238,8 +14238,8 @@
         </p:nvSpPr>
         <p:spPr>
           <a:xfrm>
-            <a:off x="10819384" y="2264664"/>
-            <a:ext cx="382016" cy="457200"/>
+            <a:off x="10814207" y="2369820"/>
+            <a:ext cx="307595" cy="457200"/>
           </a:xfrm>
           <a:prstGeom prst="rect">
             <a:avLst/>
@@ -14248,7 +14248,7 @@
         </p:spPr>
         <p:txBody>
           <a:bodyPr wrap="none" lIns="45720" rIns="45720" tIns="18288" bIns="18288" anchor="ctr">
-            <a:spAutoFit/>
+            <a:noAutofit/>
           </a:bodyPr>
           <a:lstStyle/>
           <a:p>
@@ -14273,7 +14273,7 @@
         </p:nvSpPr>
         <p:spPr>
           <a:xfrm>
-            <a:off x="777240" y="3066287"/>
+            <a:off x="777240" y="3276599"/>
             <a:ext cx="10607040" cy="465151"/>
           </a:xfrm>
           <a:prstGeom prst="rect">
@@ -14641,8 +14641,8 @@
         </p:nvSpPr>
         <p:spPr>
           <a:xfrm>
-            <a:off x="1097280" y="2173224"/>
-            <a:ext cx="2957576" cy="457200"/>
+            <a:off x="1176876" y="2278379"/>
+            <a:ext cx="2867900" cy="457200"/>
           </a:xfrm>
           <a:prstGeom prst="rect">
             <a:avLst/>
@@ -14651,7 +14651,7 @@
         </p:spPr>
         <p:txBody>
           <a:bodyPr wrap="none" lIns="45720" rIns="45720" tIns="18288" bIns="18288" anchor="ctr">
-            <a:spAutoFit/>
+            <a:noAutofit/>
           </a:bodyPr>
           <a:lstStyle/>
           <a:p>
@@ -14670,7 +14670,7 @@
       </p:sp>
       <p:pic>
         <p:nvPicPr>
-          <p:cNvPr id="10" name="Picture 9" descr="e0370a0bf7c70c8e.png"/>
+          <p:cNvPr id="10" name="Picture 9" descr="8510a940fc60582e.png"/>
           <p:cNvPicPr>
             <a:picLocks noChangeAspect="1"/>
           </p:cNvPicPr>
@@ -14684,8 +14684,8 @@
         </p:blipFill>
         <p:spPr>
           <a:xfrm>
-            <a:off x="3917696" y="2103120"/>
-            <a:ext cx="1987296" cy="597408"/>
+            <a:off x="3907616" y="2103120"/>
+            <a:ext cx="2185416" cy="807720"/>
           </a:xfrm>
           <a:prstGeom prst="rect">
             <a:avLst/>
@@ -14700,8 +14700,8 @@
         </p:nvSpPr>
         <p:spPr>
           <a:xfrm>
-            <a:off x="5904992" y="2173224"/>
-            <a:ext cx="3472688" cy="457200"/>
+            <a:off x="6093032" y="2278379"/>
+            <a:ext cx="2925902" cy="457200"/>
           </a:xfrm>
           <a:prstGeom prst="rect">
             <a:avLst/>
@@ -14710,7 +14710,7 @@
         </p:spPr>
         <p:txBody>
           <a:bodyPr wrap="none" lIns="45720" rIns="45720" tIns="18288" bIns="18288" anchor="ctr">
-            <a:spAutoFit/>
+            <a:noAutofit/>
           </a:bodyPr>
           <a:lstStyle/>
           <a:p>
@@ -14729,7 +14729,7 @@
       </p:sp>
       <p:pic>
         <p:nvPicPr>
-          <p:cNvPr id="12" name="Picture 11" descr="94da6c4095d204bb.png"/>
+          <p:cNvPr id="12" name="Picture 11" descr="895c1949fc6ae630.png"/>
           <p:cNvPicPr>
             <a:picLocks noChangeAspect="1"/>
           </p:cNvPicPr>
@@ -14743,8 +14743,8 @@
         </p:blipFill>
         <p:spPr>
           <a:xfrm>
-            <a:off x="9240520" y="2103120"/>
-            <a:ext cx="1578864" cy="597408"/>
+            <a:off x="8881775" y="2103120"/>
+            <a:ext cx="1932432" cy="807720"/>
           </a:xfrm>
           <a:prstGeom prst="rect">
             <a:avLst/>
@@ -14759,8 +14759,8 @@
         </p:nvSpPr>
         <p:spPr>
           <a:xfrm>
-            <a:off x="10819384" y="2173224"/>
-            <a:ext cx="382016" cy="457200"/>
+            <a:off x="10814207" y="2278379"/>
+            <a:ext cx="307595" cy="457200"/>
           </a:xfrm>
           <a:prstGeom prst="rect">
             <a:avLst/>
@@ -14769,7 +14769,7 @@
         </p:spPr>
         <p:txBody>
           <a:bodyPr wrap="none" lIns="45720" rIns="45720" tIns="18288" bIns="18288" anchor="ctr">
-            <a:spAutoFit/>
+            <a:noAutofit/>
           </a:bodyPr>
           <a:lstStyle/>
           <a:p>
@@ -14794,7 +14794,7 @@
         </p:nvSpPr>
         <p:spPr>
           <a:xfrm>
-            <a:off x="777240" y="2974847"/>
+            <a:off x="777240" y="3185159"/>
             <a:ext cx="10607040" cy="465151"/>
           </a:xfrm>
           <a:prstGeom prst="rect">
@@ -14829,7 +14829,7 @@
         </p:nvSpPr>
         <p:spPr>
           <a:xfrm>
-            <a:off x="1828800" y="3595447"/>
+            <a:off x="1828800" y="3805759"/>
             <a:ext cx="8503920" cy="548640"/>
           </a:xfrm>
           <a:prstGeom prst="rect">
@@ -18301,8 +18301,8 @@
         </p:nvSpPr>
         <p:spPr>
           <a:xfrm>
-            <a:off x="3394964" y="2410968"/>
-            <a:ext cx="1927352" cy="457200"/>
+            <a:off x="3332085" y="2516124"/>
+            <a:ext cx="1854989" cy="457200"/>
           </a:xfrm>
           <a:prstGeom prst="rect">
             <a:avLst/>
@@ -18311,7 +18311,7 @@
         </p:spPr>
         <p:txBody>
           <a:bodyPr wrap="none" lIns="45720" rIns="45720" tIns="18288" bIns="18288" anchor="ctr">
-            <a:spAutoFit/>
+            <a:noAutofit/>
           </a:bodyPr>
           <a:lstStyle/>
           <a:p>
@@ -18330,7 +18330,7 @@
       </p:sp>
       <p:pic>
         <p:nvPicPr>
-          <p:cNvPr id="12" name="Picture 11" descr="91ef550cfca487f8.png"/>
+          <p:cNvPr id="12" name="Picture 11" descr="42361f5bf2cb3087.png"/>
           <p:cNvPicPr>
             <a:picLocks noChangeAspect="1"/>
           </p:cNvPicPr>
@@ -18344,8 +18344,8 @@
         </p:blipFill>
         <p:spPr>
           <a:xfrm>
-            <a:off x="5185156" y="2340864"/>
-            <a:ext cx="3581400" cy="597408"/>
+            <a:off x="5049914" y="2340864"/>
+            <a:ext cx="3779520" cy="807720"/>
           </a:xfrm>
           <a:prstGeom prst="rect">
             <a:avLst/>
@@ -18360,8 +18360,8 @@
         </p:nvSpPr>
         <p:spPr>
           <a:xfrm>
-            <a:off x="3087115" y="3334512"/>
-            <a:ext cx="1927352" cy="457200"/>
+            <a:off x="2943041" y="3669792"/>
+            <a:ext cx="1621140" cy="457200"/>
           </a:xfrm>
           <a:prstGeom prst="rect">
             <a:avLst/>
@@ -18370,7 +18370,7 @@
         </p:spPr>
         <p:txBody>
           <a:bodyPr wrap="none" lIns="45720" rIns="45720" tIns="18288" bIns="18288" anchor="ctr">
-            <a:spAutoFit/>
+            <a:noAutofit/>
           </a:bodyPr>
           <a:lstStyle/>
           <a:p>
@@ -18389,7 +18389,7 @@
       </p:sp>
       <p:pic>
         <p:nvPicPr>
-          <p:cNvPr id="14" name="Picture 13" descr="a2796b49829679b1.png"/>
+          <p:cNvPr id="14" name="Picture 13" descr="7ec8d2a0a2d2d087.png"/>
           <p:cNvPicPr>
             <a:picLocks noChangeAspect="1"/>
           </p:cNvPicPr>
@@ -18403,8 +18403,8 @@
         </p:blipFill>
         <p:spPr>
           <a:xfrm>
-            <a:off x="4877308" y="3212592"/>
-            <a:ext cx="4197096" cy="701040"/>
+            <a:off x="4427022" y="3422904"/>
+            <a:ext cx="4791456" cy="950976"/>
           </a:xfrm>
           <a:prstGeom prst="rect">
             <a:avLst/>
@@ -18419,7 +18419,7 @@
         </p:nvSpPr>
         <p:spPr>
           <a:xfrm>
-            <a:off x="987552" y="4251960"/>
+            <a:off x="987552" y="4712208"/>
             <a:ext cx="10131551" cy="475488"/>
           </a:xfrm>
           <a:prstGeom prst="rect">
@@ -18998,7 +18998,7 @@
         <p:spPr>
           <a:xfrm>
             <a:off x="1581912" y="5033771"/>
-            <a:ext cx="4615180" cy="457200"/>
+            <a:ext cx="4078112" cy="457200"/>
           </a:xfrm>
           <a:prstGeom prst="rect">
             <a:avLst/>
@@ -19007,7 +19007,7 @@
         </p:spPr>
         <p:txBody>
           <a:bodyPr wrap="none" lIns="45720" rIns="45720" tIns="18288" bIns="18288" anchor="ctr">
-            <a:spAutoFit/>
+            <a:noAutofit/>
           </a:bodyPr>
           <a:lstStyle/>
           <a:p>
@@ -19040,7 +19040,7 @@
         </p:blipFill>
         <p:spPr>
           <a:xfrm>
-            <a:off x="6059932" y="5084064"/>
+            <a:off x="5522864" y="5084064"/>
             <a:ext cx="3118104" cy="356616"/>
           </a:xfrm>
           <a:prstGeom prst="rect">
@@ -19056,8 +19056,8 @@
         </p:nvSpPr>
         <p:spPr>
           <a:xfrm>
-            <a:off x="9178036" y="5033771"/>
-            <a:ext cx="1226820" cy="457200"/>
+            <a:off x="8640968" y="5033771"/>
+            <a:ext cx="1002676" cy="457200"/>
           </a:xfrm>
           <a:prstGeom prst="rect">
             <a:avLst/>
@@ -19066,7 +19066,7 @@
         </p:spPr>
         <p:txBody>
           <a:bodyPr wrap="none" lIns="45720" rIns="45720" tIns="18288" bIns="18288" anchor="ctr">
-            <a:spAutoFit/>
+            <a:noAutofit/>
           </a:bodyPr>
           <a:lstStyle/>
           <a:p>
@@ -19099,7 +19099,7 @@
         </p:blipFill>
         <p:spPr>
           <a:xfrm>
-            <a:off x="10267696" y="5091683"/>
+            <a:off x="9506485" y="5091683"/>
             <a:ext cx="323088" cy="341376"/>
           </a:xfrm>
           <a:prstGeom prst="rect">
@@ -19115,8 +19115,8 @@
         </p:nvSpPr>
         <p:spPr>
           <a:xfrm>
-            <a:off x="10590784" y="5033771"/>
-            <a:ext cx="379729" cy="457200"/>
+            <a:off x="9829573" y="5033771"/>
+            <a:ext cx="296395" cy="457200"/>
           </a:xfrm>
           <a:prstGeom prst="rect">
             <a:avLst/>
@@ -19125,7 +19125,7 @@
         </p:spPr>
         <p:txBody>
           <a:bodyPr wrap="none" lIns="45720" rIns="45720" tIns="18288" bIns="18288" anchor="ctr">
-            <a:spAutoFit/>
+            <a:noAutofit/>
           </a:bodyPr>
           <a:lstStyle/>
           <a:p>
@@ -19407,7 +19407,7 @@
       </p:sp>
       <p:pic>
         <p:nvPicPr>
-          <p:cNvPr id="9" name="Picture 8" descr="55527db45e5eea65.png"/>
+          <p:cNvPr id="9" name="Picture 8" descr="9c240cefdf3b14b2.png"/>
           <p:cNvPicPr>
             <a:picLocks noChangeAspect="1"/>
           </p:cNvPicPr>
@@ -19421,8 +19421,8 @@
         </p:blipFill>
         <p:spPr>
           <a:xfrm>
-            <a:off x="5737859" y="2103120"/>
-            <a:ext cx="685800" cy="603504"/>
+            <a:off x="5591555" y="2103120"/>
+            <a:ext cx="978408" cy="804672"/>
           </a:xfrm>
           <a:prstGeom prst="rect">
             <a:avLst/>
@@ -19437,7 +19437,7 @@
         </p:nvSpPr>
         <p:spPr>
           <a:xfrm>
-            <a:off x="777240" y="3209544"/>
+            <a:off x="777240" y="3410712"/>
             <a:ext cx="10607040" cy="429370"/>
           </a:xfrm>
           <a:prstGeom prst="rect">
@@ -19729,7 +19729,7 @@
       </p:sp>
       <p:pic>
         <p:nvPicPr>
-          <p:cNvPr id="9" name="Picture 8" descr="6b93d50c9797844c.png"/>
+          <p:cNvPr id="9" name="Picture 8" descr="eb98348dd648bf86.png"/>
           <p:cNvPicPr>
             <a:picLocks noChangeAspect="1"/>
           </p:cNvPicPr>
@@ -19744,7 +19744,7 @@
         <p:spPr>
           <a:xfrm>
             <a:off x="1828800" y="1920240"/>
-            <a:ext cx="2389632" cy="603504"/>
+            <a:ext cx="3029712" cy="804672"/>
           </a:xfrm>
           <a:prstGeom prst="rect">
             <a:avLst/>
@@ -19759,8 +19759,8 @@
         </p:nvSpPr>
         <p:spPr>
           <a:xfrm>
-            <a:off x="4675632" y="1993392"/>
-            <a:ext cx="6400800" cy="502920"/>
+            <a:off x="5315712" y="2093976"/>
+            <a:ext cx="6068567" cy="502920"/>
           </a:xfrm>
           <a:prstGeom prst="rect">
             <a:avLst/>
@@ -19788,7 +19788,7 @@
       </p:sp>
       <p:pic>
         <p:nvPicPr>
-          <p:cNvPr id="11" name="Picture 10" descr="0842bd950265f70f.png"/>
+          <p:cNvPr id="11" name="Picture 10" descr="af66b1ae4fb0b50c.png"/>
           <p:cNvPicPr>
             <a:picLocks noChangeAspect="1"/>
           </p:cNvPicPr>
@@ -19802,8 +19802,8 @@
         </p:blipFill>
         <p:spPr>
           <a:xfrm>
-            <a:off x="1828800" y="2798064"/>
-            <a:ext cx="2401824" cy="603504"/>
+            <a:off x="1828800" y="2999232"/>
+            <a:ext cx="3048000" cy="804672"/>
           </a:xfrm>
           <a:prstGeom prst="rect">
             <a:avLst/>
@@ -19818,8 +19818,8 @@
         </p:nvSpPr>
         <p:spPr>
           <a:xfrm>
-            <a:off x="4687824" y="2871216"/>
-            <a:ext cx="6400800" cy="502920"/>
+            <a:off x="5334000" y="3172968"/>
+            <a:ext cx="6050279" cy="502920"/>
           </a:xfrm>
           <a:prstGeom prst="rect">
             <a:avLst/>
@@ -19847,7 +19847,7 @@
       </p:sp>
       <p:pic>
         <p:nvPicPr>
-          <p:cNvPr id="13" name="Picture 12" descr="c65b5ac1359742e7.png"/>
+          <p:cNvPr id="13" name="Picture 12" descr="38137248e941d2ca.png"/>
           <p:cNvPicPr>
             <a:picLocks noChangeAspect="1"/>
           </p:cNvPicPr>
@@ -19861,8 +19861,8 @@
         </p:blipFill>
         <p:spPr>
           <a:xfrm>
-            <a:off x="1828800" y="3675888"/>
-            <a:ext cx="1868424" cy="603504"/>
+            <a:off x="1828800" y="4078224"/>
+            <a:ext cx="1978152" cy="804672"/>
           </a:xfrm>
           <a:prstGeom prst="rect">
             <a:avLst/>
@@ -19877,7 +19877,7 @@
         </p:nvSpPr>
         <p:spPr>
           <a:xfrm>
-            <a:off x="4154423" y="3749040"/>
+            <a:off x="4264152" y="4251960"/>
             <a:ext cx="6400800" cy="502920"/>
           </a:xfrm>
           <a:prstGeom prst="rect">
@@ -19912,7 +19912,7 @@
         </p:nvSpPr>
         <p:spPr>
           <a:xfrm>
-            <a:off x="777240" y="4736592"/>
+            <a:off x="777240" y="5340096"/>
             <a:ext cx="10607040" cy="548640"/>
           </a:xfrm>
           <a:prstGeom prst="rect">
@@ -20204,7 +20204,7 @@
       </p:sp>
       <p:pic>
         <p:nvPicPr>
-          <p:cNvPr id="9" name="Picture 8" descr="47f1530b421c799e.png"/>
+          <p:cNvPr id="9" name="Picture 8" descr="ecdab13571b725e6.png"/>
           <p:cNvPicPr>
             <a:picLocks noChangeAspect="1"/>
           </p:cNvPicPr>
@@ -20218,8 +20218,8 @@
         </p:blipFill>
         <p:spPr>
           <a:xfrm>
-            <a:off x="5652515" y="2194560"/>
-            <a:ext cx="856488" cy="762000"/>
+            <a:off x="5469636" y="2194560"/>
+            <a:ext cx="1222248" cy="1018032"/>
           </a:xfrm>
           <a:prstGeom prst="rect">
             <a:avLst/>

--- a/a7/build/out/u3/A7 3.03  Slides.pptx
+++ b/a7/build/out/u3/A7 3.03  Slides.pptx
@@ -3817,7 +3817,7 @@
       </p:sp>
       <p:pic>
         <p:nvPicPr>
-          <p:cNvPr id="9" name="Picture 8" descr="ecdab13571b725e6.png"/>
+          <p:cNvPr id="9" name="Picture 8" descr="258db9196d70ebce.png"/>
           <p:cNvPicPr>
             <a:picLocks noChangeAspect="1"/>
           </p:cNvPicPr>
@@ -3831,8 +3831,8 @@
         </p:blipFill>
         <p:spPr>
           <a:xfrm>
-            <a:off x="5469636" y="2194560"/>
-            <a:ext cx="1222248" cy="1018032"/>
+            <a:off x="5463540" y="2194560"/>
+            <a:ext cx="1234440" cy="1011936"/>
           </a:xfrm>
           <a:prstGeom prst="rect">
             <a:avLst/>
@@ -3847,7 +3847,7 @@
         </p:nvSpPr>
         <p:spPr>
           <a:xfrm>
-            <a:off x="777240" y="3532632"/>
+            <a:off x="777240" y="3526536"/>
             <a:ext cx="10607040" cy="429370"/>
           </a:xfrm>
           <a:prstGeom prst="rect">
@@ -4559,7 +4559,7 @@
       </p:sp>
       <p:pic>
         <p:nvPicPr>
-          <p:cNvPr id="9" name="Picture 8" descr="92edf13bccdb7a7f.png"/>
+          <p:cNvPr id="9" name="Picture 8" descr="b37afdd110bf4cf6.png"/>
           <p:cNvPicPr>
             <a:picLocks noChangeAspect="1"/>
           </p:cNvPicPr>
@@ -4574,7 +4574,7 @@
         <p:spPr>
           <a:xfrm>
             <a:off x="1828800" y="1920240"/>
-            <a:ext cx="4401312" cy="880872"/>
+            <a:ext cx="4404360" cy="880872"/>
           </a:xfrm>
           <a:prstGeom prst="rect">
             <a:avLst/>
@@ -4589,8 +4589,8 @@
         </p:nvSpPr>
         <p:spPr>
           <a:xfrm>
-            <a:off x="6687312" y="2132076"/>
-            <a:ext cx="4696967" cy="502920"/>
+            <a:off x="6690360" y="2132076"/>
+            <a:ext cx="4693920" cy="502920"/>
           </a:xfrm>
           <a:prstGeom prst="rect">
             <a:avLst/>
@@ -4618,7 +4618,7 @@
       </p:sp>
       <p:pic>
         <p:nvPicPr>
-          <p:cNvPr id="11" name="Picture 10" descr="3f689093a9bbe572.png"/>
+          <p:cNvPr id="11" name="Picture 10" descr="2cffd552d2c82902.png"/>
           <p:cNvPicPr>
             <a:picLocks noChangeAspect="1"/>
           </p:cNvPicPr>
@@ -4633,7 +4633,7 @@
         <p:spPr>
           <a:xfrm>
             <a:off x="1828800" y="3075432"/>
-            <a:ext cx="2791968" cy="694944"/>
+            <a:ext cx="2795016" cy="701040"/>
           </a:xfrm>
           <a:prstGeom prst="rect">
             <a:avLst/>
@@ -4648,8 +4648,8 @@
         </p:nvSpPr>
         <p:spPr>
           <a:xfrm>
-            <a:off x="5077967" y="3194304"/>
-            <a:ext cx="6306312" cy="502920"/>
+            <a:off x="5081016" y="3197352"/>
+            <a:ext cx="6303263" cy="502920"/>
           </a:xfrm>
           <a:prstGeom prst="rect">
             <a:avLst/>
@@ -4677,7 +4677,7 @@
       </p:sp>
       <p:pic>
         <p:nvPicPr>
-          <p:cNvPr id="13" name="Picture 12" descr="164833d7c90ff5d2.png"/>
+          <p:cNvPr id="13" name="Picture 12" descr="ff562aba6b37e15b.png"/>
           <p:cNvPicPr>
             <a:picLocks noChangeAspect="1"/>
           </p:cNvPicPr>
@@ -4691,7 +4691,7 @@
         </p:blipFill>
         <p:spPr>
           <a:xfrm>
-            <a:off x="1828800" y="4044695"/>
+            <a:off x="1828800" y="4050791"/>
             <a:ext cx="2505456" cy="411480"/>
           </a:xfrm>
           <a:prstGeom prst="rect">
@@ -4707,7 +4707,7 @@
         </p:nvSpPr>
         <p:spPr>
           <a:xfrm>
-            <a:off x="4791456" y="4021835"/>
+            <a:off x="4791456" y="4027931"/>
             <a:ext cx="6400800" cy="502920"/>
           </a:xfrm>
           <a:prstGeom prst="rect">
@@ -4742,7 +4742,7 @@
         </p:nvSpPr>
         <p:spPr>
           <a:xfrm>
-            <a:off x="777240" y="4913376"/>
+            <a:off x="777240" y="4919472"/>
             <a:ext cx="10607040" cy="548640"/>
           </a:xfrm>
           <a:prstGeom prst="rect">
@@ -5321,7 +5321,7 @@
       </p:sp>
       <p:pic>
         <p:nvPicPr>
-          <p:cNvPr id="9" name="Picture 8" descr="274e6fec14c7e780.png"/>
+          <p:cNvPr id="9" name="Picture 8" descr="9c8c9afa26dfe5ba.png"/>
           <p:cNvPicPr>
             <a:picLocks noChangeAspect="1"/>
           </p:cNvPicPr>
@@ -5335,8 +5335,8 @@
         </p:blipFill>
         <p:spPr>
           <a:xfrm>
-            <a:off x="5004815" y="2194560"/>
-            <a:ext cx="2151888" cy="1091184"/>
+            <a:off x="5003291" y="2194560"/>
+            <a:ext cx="2154936" cy="1088136"/>
           </a:xfrm>
           <a:prstGeom prst="rect">
             <a:avLst/>
@@ -5351,7 +5351,7 @@
         </p:nvSpPr>
         <p:spPr>
           <a:xfrm>
-            <a:off x="777240" y="3605784"/>
+            <a:off x="777240" y="3602736"/>
             <a:ext cx="10607040" cy="429370"/>
           </a:xfrm>
           <a:prstGeom prst="rect">
@@ -6267,7 +6267,7 @@
         </p:nvSpPr>
         <p:spPr>
           <a:xfrm>
-            <a:off x="1543419" y="2080260"/>
+            <a:off x="1541895" y="2080260"/>
             <a:ext cx="3658371" cy="457200"/>
           </a:xfrm>
           <a:prstGeom prst="rect">
@@ -6296,7 +6296,7 @@
       </p:sp>
       <p:pic>
         <p:nvPicPr>
-          <p:cNvPr id="10" name="Picture 9" descr="a9a688dcb3598704.png"/>
+          <p:cNvPr id="10" name="Picture 9" descr="f7a71b8e0c2f4db4.png"/>
           <p:cNvPicPr>
             <a:picLocks noChangeAspect="1"/>
           </p:cNvPicPr>
@@ -6310,8 +6310,8 @@
         </p:blipFill>
         <p:spPr>
           <a:xfrm>
-            <a:off x="5064631" y="2136648"/>
-            <a:ext cx="935736" cy="344424"/>
+            <a:off x="5063107" y="2135124"/>
+            <a:ext cx="935736" cy="347472"/>
           </a:xfrm>
           <a:prstGeom prst="rect">
             <a:avLst/>
@@ -6326,7 +6326,7 @@
         </p:nvSpPr>
         <p:spPr>
           <a:xfrm>
-            <a:off x="6000367" y="2080260"/>
+            <a:off x="5998843" y="2080260"/>
             <a:ext cx="1733884" cy="457200"/>
           </a:xfrm>
           <a:prstGeom prst="rect">
@@ -6355,7 +6355,7 @@
       </p:sp>
       <p:pic>
         <p:nvPicPr>
-          <p:cNvPr id="12" name="Picture 11" descr="2b46a8bae93fb0d7.png"/>
+          <p:cNvPr id="12" name="Picture 11" descr="06a2c5e4e203d487.png"/>
           <p:cNvPicPr>
             <a:picLocks noChangeAspect="1"/>
           </p:cNvPicPr>
@@ -6369,8 +6369,8 @@
         </p:blipFill>
         <p:spPr>
           <a:xfrm>
-            <a:off x="7597091" y="2138171"/>
-            <a:ext cx="332232" cy="341376"/>
+            <a:off x="7595567" y="2138171"/>
+            <a:ext cx="335280" cy="341376"/>
           </a:xfrm>
           <a:prstGeom prst="rect">
             <a:avLst/>
@@ -6385,7 +6385,7 @@
         </p:nvSpPr>
         <p:spPr>
           <a:xfrm>
-            <a:off x="7929323" y="2080260"/>
+            <a:off x="7930847" y="2080260"/>
             <a:ext cx="2825936" cy="457200"/>
           </a:xfrm>
           <a:prstGeom prst="rect">
@@ -7219,7 +7219,7 @@
       </p:sp>
       <p:pic>
         <p:nvPicPr>
-          <p:cNvPr id="9" name="Picture 8" descr="eca797d063644f8c.png"/>
+          <p:cNvPr id="9" name="Picture 8" descr="0ce70980e9b55365.png"/>
           <p:cNvPicPr>
             <a:picLocks noChangeAspect="1"/>
           </p:cNvPicPr>
@@ -7233,8 +7233,8 @@
         </p:blipFill>
         <p:spPr>
           <a:xfrm>
-            <a:off x="5234940" y="2103120"/>
-            <a:ext cx="1691640" cy="518160"/>
+            <a:off x="5231891" y="2103120"/>
+            <a:ext cx="1697736" cy="515112"/>
           </a:xfrm>
           <a:prstGeom prst="rect">
             <a:avLst/>
@@ -7249,7 +7249,7 @@
         </p:nvSpPr>
         <p:spPr>
           <a:xfrm>
-            <a:off x="1828800" y="2895599"/>
+            <a:off x="1828800" y="2892552"/>
             <a:ext cx="8503920" cy="548640"/>
           </a:xfrm>
           <a:prstGeom prst="rect">
@@ -8512,7 +8512,7 @@
       </p:sp>
       <p:pic>
         <p:nvPicPr>
-          <p:cNvPr id="9" name="Picture 8" descr="32948134bf5e3591.png"/>
+          <p:cNvPr id="9" name="Picture 8" descr="e24bc4e0a0607076.png"/>
           <p:cNvPicPr>
             <a:picLocks noChangeAspect="1"/>
           </p:cNvPicPr>
@@ -8526,8 +8526,8 @@
         </p:blipFill>
         <p:spPr>
           <a:xfrm>
-            <a:off x="5384291" y="2103120"/>
-            <a:ext cx="1392936" cy="1185672"/>
+            <a:off x="5376671" y="2103120"/>
+            <a:ext cx="1408176" cy="1182624"/>
           </a:xfrm>
           <a:prstGeom prst="rect">
             <a:avLst/>
@@ -8542,7 +8542,7 @@
         </p:nvSpPr>
         <p:spPr>
           <a:xfrm>
-            <a:off x="1828800" y="3563112"/>
+            <a:off x="1828800" y="3560063"/>
             <a:ext cx="8503920" cy="548640"/>
           </a:xfrm>
           <a:prstGeom prst="rect">
@@ -9271,7 +9271,7 @@
       </p:sp>
       <p:pic>
         <p:nvPicPr>
-          <p:cNvPr id="9" name="Picture 8" descr="5b85e638d34eb13f.png"/>
+          <p:cNvPr id="9" name="Picture 8" descr="a8fa097f61cf2d4e.png"/>
           <p:cNvPicPr>
             <a:picLocks noChangeAspect="1"/>
           </p:cNvPicPr>
@@ -9286,7 +9286,7 @@
         <p:spPr>
           <a:xfrm>
             <a:off x="5280659" y="2103120"/>
-            <a:ext cx="1600200" cy="1014984"/>
+            <a:ext cx="1600200" cy="1021080"/>
           </a:xfrm>
           <a:prstGeom prst="rect">
             <a:avLst/>
@@ -9301,7 +9301,7 @@
         </p:nvSpPr>
         <p:spPr>
           <a:xfrm>
-            <a:off x="1828800" y="3392424"/>
+            <a:off x="1828800" y="3398519"/>
             <a:ext cx="8503920" cy="548640"/>
           </a:xfrm>
           <a:prstGeom prst="rect">
@@ -10188,7 +10188,7 @@
       </p:sp>
       <p:pic>
         <p:nvPicPr>
-          <p:cNvPr id="9" name="Picture 8" descr="85a5d92abe26b906.png"/>
+          <p:cNvPr id="9" name="Picture 8" descr="639a6b0d53b4323e.png"/>
           <p:cNvPicPr>
             <a:picLocks noChangeAspect="1"/>
           </p:cNvPicPr>
@@ -10202,8 +10202,8 @@
         </p:blipFill>
         <p:spPr>
           <a:xfrm>
-            <a:off x="5006340" y="2103120"/>
-            <a:ext cx="2148840" cy="1100328"/>
+            <a:off x="4998719" y="2103120"/>
+            <a:ext cx="2164080" cy="1094232"/>
           </a:xfrm>
           <a:prstGeom prst="rect">
             <a:avLst/>
@@ -10218,7 +10218,7 @@
         </p:nvSpPr>
         <p:spPr>
           <a:xfrm>
-            <a:off x="777240" y="3432047"/>
+            <a:off x="777240" y="3425952"/>
             <a:ext cx="10607040" cy="465151"/>
           </a:xfrm>
           <a:prstGeom prst="rect">
@@ -10253,7 +10253,7 @@
         </p:nvSpPr>
         <p:spPr>
           <a:xfrm>
-            <a:off x="1874519" y="4098367"/>
+            <a:off x="1874519" y="4092271"/>
             <a:ext cx="4572000" cy="548640"/>
           </a:xfrm>
           <a:prstGeom prst="rect">
@@ -10297,7 +10297,7 @@
         </p:nvSpPr>
         <p:spPr>
           <a:xfrm>
-            <a:off x="6629400" y="4098367"/>
+            <a:off x="6629400" y="4092271"/>
             <a:ext cx="4572000" cy="548640"/>
           </a:xfrm>
           <a:prstGeom prst="rect">
@@ -10350,7 +10350,7 @@
         </p:nvSpPr>
         <p:spPr>
           <a:xfrm>
-            <a:off x="1874519" y="4784167"/>
+            <a:off x="1874519" y="4778071"/>
             <a:ext cx="4572000" cy="548640"/>
           </a:xfrm>
           <a:prstGeom prst="rect">
@@ -10394,7 +10394,7 @@
         </p:nvSpPr>
         <p:spPr>
           <a:xfrm>
-            <a:off x="6629400" y="4784167"/>
+            <a:off x="6629400" y="4778071"/>
             <a:ext cx="4572000" cy="548640"/>
           </a:xfrm>
           <a:prstGeom prst="rect">
@@ -11335,7 +11335,7 @@
       </p:sp>
       <p:pic>
         <p:nvPicPr>
-          <p:cNvPr id="9" name="Picture 8" descr="36dd69d05a8fa1b0.png"/>
+          <p:cNvPr id="9" name="Picture 8" descr="fb0746628bca84a4.png"/>
           <p:cNvPicPr>
             <a:picLocks noChangeAspect="1"/>
           </p:cNvPicPr>
@@ -11349,8 +11349,8 @@
         </p:blipFill>
         <p:spPr>
           <a:xfrm>
-            <a:off x="5074919" y="2103120"/>
-            <a:ext cx="2011680" cy="1005840"/>
+            <a:off x="5068824" y="2103120"/>
+            <a:ext cx="2023872" cy="1005840"/>
           </a:xfrm>
           <a:prstGeom prst="rect">
             <a:avLst/>
@@ -12306,7 +12306,7 @@
       </p:sp>
       <p:pic>
         <p:nvPicPr>
-          <p:cNvPr id="9" name="Picture 8" descr="1564dccdbc1be462.png"/>
+          <p:cNvPr id="9" name="Picture 8" descr="2a624714308fb26a.png"/>
           <p:cNvPicPr>
             <a:picLocks noChangeAspect="1"/>
           </p:cNvPicPr>
@@ -12320,8 +12320,8 @@
         </p:blipFill>
         <p:spPr>
           <a:xfrm>
-            <a:off x="4840224" y="2103120"/>
-            <a:ext cx="2481072" cy="518160"/>
+            <a:off x="4838699" y="2103120"/>
+            <a:ext cx="2484120" cy="515112"/>
           </a:xfrm>
           <a:prstGeom prst="rect">
             <a:avLst/>
@@ -12336,7 +12336,7 @@
         </p:nvSpPr>
         <p:spPr>
           <a:xfrm>
-            <a:off x="1828800" y="2895599"/>
+            <a:off x="1828800" y="2892552"/>
             <a:ext cx="8503920" cy="548640"/>
           </a:xfrm>
           <a:prstGeom prst="rect">
@@ -13739,7 +13739,7 @@
       </p:sp>
       <p:pic>
         <p:nvPicPr>
-          <p:cNvPr id="9" name="Picture 8" descr="a2077b17c7711d12.png"/>
+          <p:cNvPr id="9" name="Picture 8" descr="adbcd6f49d73f424.png"/>
           <p:cNvPicPr>
             <a:picLocks noChangeAspect="1"/>
           </p:cNvPicPr>
@@ -13753,8 +13753,8 @@
         </p:blipFill>
         <p:spPr>
           <a:xfrm>
-            <a:off x="4783836" y="2103120"/>
-            <a:ext cx="2593848" cy="1188720"/>
+            <a:off x="4776215" y="2103120"/>
+            <a:ext cx="2609088" cy="1182624"/>
           </a:xfrm>
           <a:prstGeom prst="rect">
             <a:avLst/>
@@ -13769,7 +13769,7 @@
         </p:nvSpPr>
         <p:spPr>
           <a:xfrm>
-            <a:off x="1828800" y="3566159"/>
+            <a:off x="1828800" y="3560063"/>
             <a:ext cx="8503920" cy="548640"/>
           </a:xfrm>
           <a:prstGeom prst="rect">
@@ -14641,7 +14641,7 @@
         </p:nvSpPr>
         <p:spPr>
           <a:xfrm>
-            <a:off x="1176876" y="2278379"/>
+            <a:off x="1176876" y="2276856"/>
             <a:ext cx="2867900" cy="457200"/>
           </a:xfrm>
           <a:prstGeom prst="rect">
@@ -14670,7 +14670,7 @@
       </p:sp>
       <p:pic>
         <p:nvPicPr>
-          <p:cNvPr id="10" name="Picture 9" descr="8510a940fc60582e.png"/>
+          <p:cNvPr id="10" name="Picture 9" descr="7eecc4c6e0dafa56.png"/>
           <p:cNvPicPr>
             <a:picLocks noChangeAspect="1"/>
           </p:cNvPicPr>
@@ -14685,7 +14685,7 @@
         <p:spPr>
           <a:xfrm>
             <a:off x="3907616" y="2103120"/>
-            <a:ext cx="2185416" cy="807720"/>
+            <a:ext cx="2185416" cy="804672"/>
           </a:xfrm>
           <a:prstGeom prst="rect">
             <a:avLst/>
@@ -14700,7 +14700,7 @@
         </p:nvSpPr>
         <p:spPr>
           <a:xfrm>
-            <a:off x="6093032" y="2278379"/>
+            <a:off x="6093032" y="2276856"/>
             <a:ext cx="2925902" cy="457200"/>
           </a:xfrm>
           <a:prstGeom prst="rect">
@@ -14729,7 +14729,7 @@
       </p:sp>
       <p:pic>
         <p:nvPicPr>
-          <p:cNvPr id="12" name="Picture 11" descr="895c1949fc6ae630.png"/>
+          <p:cNvPr id="12" name="Picture 11" descr="d5013e6d72f4d514.png"/>
           <p:cNvPicPr>
             <a:picLocks noChangeAspect="1"/>
           </p:cNvPicPr>
@@ -14744,7 +14744,7 @@
         <p:spPr>
           <a:xfrm>
             <a:off x="8881775" y="2103120"/>
-            <a:ext cx="1932432" cy="807720"/>
+            <a:ext cx="1932432" cy="804672"/>
           </a:xfrm>
           <a:prstGeom prst="rect">
             <a:avLst/>
@@ -14759,7 +14759,7 @@
         </p:nvSpPr>
         <p:spPr>
           <a:xfrm>
-            <a:off x="10814207" y="2278379"/>
+            <a:off x="10814207" y="2276856"/>
             <a:ext cx="307595" cy="457200"/>
           </a:xfrm>
           <a:prstGeom prst="rect">
@@ -14794,7 +14794,7 @@
         </p:nvSpPr>
         <p:spPr>
           <a:xfrm>
-            <a:off x="777240" y="3185159"/>
+            <a:off x="777240" y="3182111"/>
             <a:ext cx="10607040" cy="465151"/>
           </a:xfrm>
           <a:prstGeom prst="rect">
@@ -14829,7 +14829,7 @@
         </p:nvSpPr>
         <p:spPr>
           <a:xfrm>
-            <a:off x="1828800" y="3805759"/>
+            <a:off x="1828800" y="3802711"/>
             <a:ext cx="8503920" cy="548640"/>
           </a:xfrm>
           <a:prstGeom prst="rect">
@@ -18301,7 +18301,7 @@
         </p:nvSpPr>
         <p:spPr>
           <a:xfrm>
-            <a:off x="3332085" y="2516124"/>
+            <a:off x="3332085" y="2514600"/>
             <a:ext cx="1854989" cy="457200"/>
           </a:xfrm>
           <a:prstGeom prst="rect">
@@ -18330,7 +18330,7 @@
       </p:sp>
       <p:pic>
         <p:nvPicPr>
-          <p:cNvPr id="12" name="Picture 11" descr="42361f5bf2cb3087.png"/>
+          <p:cNvPr id="12" name="Picture 11" descr="e5535b5cffe51469.png"/>
           <p:cNvPicPr>
             <a:picLocks noChangeAspect="1"/>
           </p:cNvPicPr>
@@ -18345,7 +18345,7 @@
         <p:spPr>
           <a:xfrm>
             <a:off x="5049914" y="2340864"/>
-            <a:ext cx="3779520" cy="807720"/>
+            <a:ext cx="3779520" cy="804672"/>
           </a:xfrm>
           <a:prstGeom prst="rect">
             <a:avLst/>
@@ -18360,7 +18360,7 @@
         </p:nvSpPr>
         <p:spPr>
           <a:xfrm>
-            <a:off x="2943041" y="3669792"/>
+            <a:off x="2944565" y="3665219"/>
             <a:ext cx="1621140" cy="457200"/>
           </a:xfrm>
           <a:prstGeom prst="rect">
@@ -18389,7 +18389,7 @@
       </p:sp>
       <p:pic>
         <p:nvPicPr>
-          <p:cNvPr id="14" name="Picture 13" descr="7ec8d2a0a2d2d087.png"/>
+          <p:cNvPr id="14" name="Picture 13" descr="7055adc9101d4378.png"/>
           <p:cNvPicPr>
             <a:picLocks noChangeAspect="1"/>
           </p:cNvPicPr>
@@ -18403,8 +18403,8 @@
         </p:blipFill>
         <p:spPr>
           <a:xfrm>
-            <a:off x="4427022" y="3422904"/>
-            <a:ext cx="4791456" cy="950976"/>
+            <a:off x="4428546" y="3419856"/>
+            <a:ext cx="4788408" cy="947928"/>
           </a:xfrm>
           <a:prstGeom prst="rect">
             <a:avLst/>
@@ -18419,7 +18419,7 @@
         </p:nvSpPr>
         <p:spPr>
           <a:xfrm>
-            <a:off x="987552" y="4712208"/>
+            <a:off x="987552" y="4706112"/>
             <a:ext cx="10131551" cy="475488"/>
           </a:xfrm>
           <a:prstGeom prst="rect">
@@ -19026,7 +19026,7 @@
       </p:sp>
       <p:pic>
         <p:nvPicPr>
-          <p:cNvPr id="18" name="Picture 17" descr="242238f16d3c5d83.png"/>
+          <p:cNvPr id="18" name="Picture 17" descr="f1f6a9f3d40cc3d7.png"/>
           <p:cNvPicPr>
             <a:picLocks noChangeAspect="1"/>
           </p:cNvPicPr>
@@ -19040,8 +19040,8 @@
         </p:blipFill>
         <p:spPr>
           <a:xfrm>
-            <a:off x="5522864" y="5084064"/>
-            <a:ext cx="3118104" cy="356616"/>
+            <a:off x="5522864" y="5085587"/>
+            <a:ext cx="3118104" cy="353568"/>
           </a:xfrm>
           <a:prstGeom prst="rect">
             <a:avLst/>
@@ -19085,7 +19085,7 @@
       </p:sp>
       <p:pic>
         <p:nvPicPr>
-          <p:cNvPr id="20" name="Picture 19" descr="f236243b8e8aab06.png"/>
+          <p:cNvPr id="20" name="Picture 19" descr="ae5b0572c4324ddf.png"/>
           <p:cNvPicPr>
             <a:picLocks noChangeAspect="1"/>
           </p:cNvPicPr>
@@ -19100,7 +19100,7 @@
         <p:spPr>
           <a:xfrm>
             <a:off x="9506485" y="5091683"/>
-            <a:ext cx="323088" cy="341376"/>
+            <a:ext cx="326136" cy="341376"/>
           </a:xfrm>
           <a:prstGeom prst="rect">
             <a:avLst/>
@@ -19115,7 +19115,7 @@
         </p:nvSpPr>
         <p:spPr>
           <a:xfrm>
-            <a:off x="9829573" y="5033771"/>
+            <a:off x="9832621" y="5033771"/>
             <a:ext cx="296395" cy="457200"/>
           </a:xfrm>
           <a:prstGeom prst="rect">
@@ -19729,7 +19729,7 @@
       </p:sp>
       <p:pic>
         <p:nvPicPr>
-          <p:cNvPr id="9" name="Picture 8" descr="eb98348dd648bf86.png"/>
+          <p:cNvPr id="9" name="Picture 8" descr="593c79a22248f7e1.png"/>
           <p:cNvPicPr>
             <a:picLocks noChangeAspect="1"/>
           </p:cNvPicPr>
@@ -19744,7 +19744,7 @@
         <p:spPr>
           <a:xfrm>
             <a:off x="1828800" y="1920240"/>
-            <a:ext cx="3029712" cy="804672"/>
+            <a:ext cx="3044952" cy="804672"/>
           </a:xfrm>
           <a:prstGeom prst="rect">
             <a:avLst/>
@@ -19759,8 +19759,8 @@
         </p:nvSpPr>
         <p:spPr>
           <a:xfrm>
-            <a:off x="5315712" y="2093976"/>
-            <a:ext cx="6068567" cy="502920"/>
+            <a:off x="5330952" y="2093976"/>
+            <a:ext cx="6053327" cy="502920"/>
           </a:xfrm>
           <a:prstGeom prst="rect">
             <a:avLst/>
@@ -19788,7 +19788,7 @@
       </p:sp>
       <p:pic>
         <p:nvPicPr>
-          <p:cNvPr id="11" name="Picture 10" descr="af66b1ae4fb0b50c.png"/>
+          <p:cNvPr id="11" name="Picture 10" descr="fdbf4bf677431cad.png"/>
           <p:cNvPicPr>
             <a:picLocks noChangeAspect="1"/>
           </p:cNvPicPr>
@@ -19803,7 +19803,7 @@
         <p:spPr>
           <a:xfrm>
             <a:off x="1828800" y="2999232"/>
-            <a:ext cx="3048000" cy="804672"/>
+            <a:ext cx="3060192" cy="804672"/>
           </a:xfrm>
           <a:prstGeom prst="rect">
             <a:avLst/>
@@ -19818,8 +19818,8 @@
         </p:nvSpPr>
         <p:spPr>
           <a:xfrm>
-            <a:off x="5334000" y="3172968"/>
-            <a:ext cx="6050279" cy="502920"/>
+            <a:off x="5346192" y="3172968"/>
+            <a:ext cx="6038087" cy="502920"/>
           </a:xfrm>
           <a:prstGeom prst="rect">
             <a:avLst/>
@@ -19847,7 +19847,7 @@
       </p:sp>
       <p:pic>
         <p:nvPicPr>
-          <p:cNvPr id="13" name="Picture 12" descr="38137248e941d2ca.png"/>
+          <p:cNvPr id="13" name="Picture 12" descr="3d9d3a4be89fd9bd.png"/>
           <p:cNvPicPr>
             <a:picLocks noChangeAspect="1"/>
           </p:cNvPicPr>
@@ -19862,7 +19862,7 @@
         <p:spPr>
           <a:xfrm>
             <a:off x="1828800" y="4078224"/>
-            <a:ext cx="1978152" cy="804672"/>
+            <a:ext cx="1993392" cy="804672"/>
           </a:xfrm>
           <a:prstGeom prst="rect">
             <a:avLst/>
@@ -19877,7 +19877,7 @@
         </p:nvSpPr>
         <p:spPr>
           <a:xfrm>
-            <a:off x="4264152" y="4251960"/>
+            <a:off x="4279392" y="4251960"/>
             <a:ext cx="6400800" cy="502920"/>
           </a:xfrm>
           <a:prstGeom prst="rect">

--- a/a7/build/out/u3/A7 3.03  Slides.pptx
+++ b/a7/build/out/u3/A7 3.03  Slides.pptx
@@ -3817,7 +3817,7 @@
       </p:sp>
       <p:pic>
         <p:nvPicPr>
-          <p:cNvPr id="9" name="Picture 8" descr="258db9196d70ebce.png"/>
+          <p:cNvPr id="9" name="Picture 8" descr="d381195bd435c1bd.png"/>
           <p:cNvPicPr>
             <a:picLocks noChangeAspect="1"/>
           </p:cNvPicPr>
@@ -3831,8 +3831,8 @@
         </p:blipFill>
         <p:spPr>
           <a:xfrm>
-            <a:off x="5463540" y="2194560"/>
-            <a:ext cx="1234440" cy="1011936"/>
+            <a:off x="5472683" y="2194560"/>
+            <a:ext cx="1216152" cy="1011936"/>
           </a:xfrm>
           <a:prstGeom prst="rect">
             <a:avLst/>
@@ -4559,7 +4559,7 @@
       </p:sp>
       <p:pic>
         <p:nvPicPr>
-          <p:cNvPr id="9" name="Picture 8" descr="b37afdd110bf4cf6.png"/>
+          <p:cNvPr id="9" name="Picture 8" descr="8f14d1bdb840e74d.png"/>
           <p:cNvPicPr>
             <a:picLocks noChangeAspect="1"/>
           </p:cNvPicPr>
@@ -4618,7 +4618,7 @@
       </p:sp>
       <p:pic>
         <p:nvPicPr>
-          <p:cNvPr id="11" name="Picture 10" descr="2cffd552d2c82902.png"/>
+          <p:cNvPr id="11" name="Picture 10" descr="d8954ab13f1548f8.png"/>
           <p:cNvPicPr>
             <a:picLocks noChangeAspect="1"/>
           </p:cNvPicPr>
@@ -4633,7 +4633,7 @@
         <p:spPr>
           <a:xfrm>
             <a:off x="1828800" y="3075432"/>
-            <a:ext cx="2795016" cy="701040"/>
+            <a:ext cx="2798064" cy="701040"/>
           </a:xfrm>
           <a:prstGeom prst="rect">
             <a:avLst/>
@@ -4648,8 +4648,8 @@
         </p:nvSpPr>
         <p:spPr>
           <a:xfrm>
-            <a:off x="5081016" y="3197352"/>
-            <a:ext cx="6303263" cy="502920"/>
+            <a:off x="5084064" y="3197352"/>
+            <a:ext cx="6300215" cy="502920"/>
           </a:xfrm>
           <a:prstGeom prst="rect">
             <a:avLst/>
@@ -4677,7 +4677,7 @@
       </p:sp>
       <p:pic>
         <p:nvPicPr>
-          <p:cNvPr id="13" name="Picture 12" descr="ff562aba6b37e15b.png"/>
+          <p:cNvPr id="13" name="Picture 12" descr="c6322a597974340d.png"/>
           <p:cNvPicPr>
             <a:picLocks noChangeAspect="1"/>
           </p:cNvPicPr>
@@ -4692,7 +4692,7 @@
         <p:spPr>
           <a:xfrm>
             <a:off x="1828800" y="4050791"/>
-            <a:ext cx="2505456" cy="411480"/>
+            <a:ext cx="2508504" cy="411480"/>
           </a:xfrm>
           <a:prstGeom prst="rect">
             <a:avLst/>
@@ -4707,7 +4707,7 @@
         </p:nvSpPr>
         <p:spPr>
           <a:xfrm>
-            <a:off x="4791456" y="4027931"/>
+            <a:off x="4794504" y="4027931"/>
             <a:ext cx="6400800" cy="502920"/>
           </a:xfrm>
           <a:prstGeom prst="rect">
@@ -5321,7 +5321,7 @@
       </p:sp>
       <p:pic>
         <p:nvPicPr>
-          <p:cNvPr id="9" name="Picture 8" descr="9c8c9afa26dfe5ba.png"/>
+          <p:cNvPr id="9" name="Picture 8" descr="e1a3a8f726b8bfc3.png"/>
           <p:cNvPicPr>
             <a:picLocks noChangeAspect="1"/>
           </p:cNvPicPr>
@@ -5335,8 +5335,8 @@
         </p:blipFill>
         <p:spPr>
           <a:xfrm>
-            <a:off x="5003291" y="2194560"/>
-            <a:ext cx="2154936" cy="1088136"/>
+            <a:off x="5007864" y="2194560"/>
+            <a:ext cx="2145792" cy="1091184"/>
           </a:xfrm>
           <a:prstGeom prst="rect">
             <a:avLst/>
@@ -5351,7 +5351,7 @@
         </p:nvSpPr>
         <p:spPr>
           <a:xfrm>
-            <a:off x="777240" y="3602736"/>
+            <a:off x="777240" y="3605784"/>
             <a:ext cx="10607040" cy="429370"/>
           </a:xfrm>
           <a:prstGeom prst="rect">
@@ -6267,7 +6267,7 @@
         </p:nvSpPr>
         <p:spPr>
           <a:xfrm>
-            <a:off x="1541895" y="2080260"/>
+            <a:off x="1540371" y="2080260"/>
             <a:ext cx="3658371" cy="457200"/>
           </a:xfrm>
           <a:prstGeom prst="rect">
@@ -6296,7 +6296,7 @@
       </p:sp>
       <p:pic>
         <p:nvPicPr>
-          <p:cNvPr id="10" name="Picture 9" descr="f7a71b8e0c2f4db4.png"/>
+          <p:cNvPr id="10" name="Picture 9" descr="799e3e8272a315fb.png"/>
           <p:cNvPicPr>
             <a:picLocks noChangeAspect="1"/>
           </p:cNvPicPr>
@@ -6310,8 +6310,8 @@
         </p:blipFill>
         <p:spPr>
           <a:xfrm>
-            <a:off x="5063107" y="2135124"/>
-            <a:ext cx="935736" cy="347472"/>
+            <a:off x="5061583" y="2135124"/>
+            <a:ext cx="938784" cy="347472"/>
           </a:xfrm>
           <a:prstGeom prst="rect">
             <a:avLst/>
@@ -6326,7 +6326,7 @@
         </p:nvSpPr>
         <p:spPr>
           <a:xfrm>
-            <a:off x="5998843" y="2080260"/>
+            <a:off x="6000367" y="2080260"/>
             <a:ext cx="1733884" cy="457200"/>
           </a:xfrm>
           <a:prstGeom prst="rect">
@@ -6355,7 +6355,7 @@
       </p:sp>
       <p:pic>
         <p:nvPicPr>
-          <p:cNvPr id="12" name="Picture 11" descr="06a2c5e4e203d487.png"/>
+          <p:cNvPr id="12" name="Picture 11" descr="8616d6e97c2e53ba.png"/>
           <p:cNvPicPr>
             <a:picLocks noChangeAspect="1"/>
           </p:cNvPicPr>
@@ -6369,7 +6369,7 @@
         </p:blipFill>
         <p:spPr>
           <a:xfrm>
-            <a:off x="7595567" y="2138171"/>
+            <a:off x="7597091" y="2138171"/>
             <a:ext cx="335280" cy="341376"/>
           </a:xfrm>
           <a:prstGeom prst="rect">
@@ -6385,7 +6385,7 @@
         </p:nvSpPr>
         <p:spPr>
           <a:xfrm>
-            <a:off x="7930847" y="2080260"/>
+            <a:off x="7932371" y="2080260"/>
             <a:ext cx="2825936" cy="457200"/>
           </a:xfrm>
           <a:prstGeom prst="rect">
@@ -7219,7 +7219,7 @@
       </p:sp>
       <p:pic>
         <p:nvPicPr>
-          <p:cNvPr id="9" name="Picture 8" descr="0ce70980e9b55365.png"/>
+          <p:cNvPr id="9" name="Picture 8" descr="3af1907ef808e9a5.png"/>
           <p:cNvPicPr>
             <a:picLocks noChangeAspect="1"/>
           </p:cNvPicPr>
@@ -7233,8 +7233,8 @@
         </p:blipFill>
         <p:spPr>
           <a:xfrm>
-            <a:off x="5231891" y="2103120"/>
-            <a:ext cx="1697736" cy="515112"/>
+            <a:off x="5233415" y="2103120"/>
+            <a:ext cx="1694688" cy="518160"/>
           </a:xfrm>
           <a:prstGeom prst="rect">
             <a:avLst/>
@@ -7249,7 +7249,7 @@
         </p:nvSpPr>
         <p:spPr>
           <a:xfrm>
-            <a:off x="1828800" y="2892552"/>
+            <a:off x="1828800" y="2895599"/>
             <a:ext cx="8503920" cy="548640"/>
           </a:xfrm>
           <a:prstGeom prst="rect">
@@ -8512,7 +8512,7 @@
       </p:sp>
       <p:pic>
         <p:nvPicPr>
-          <p:cNvPr id="9" name="Picture 8" descr="e24bc4e0a0607076.png"/>
+          <p:cNvPr id="9" name="Picture 8" descr="7bfc7057b3b2cf51.png"/>
           <p:cNvPicPr>
             <a:picLocks noChangeAspect="1"/>
           </p:cNvPicPr>
@@ -8526,8 +8526,8 @@
         </p:blipFill>
         <p:spPr>
           <a:xfrm>
-            <a:off x="5376671" y="2103120"/>
-            <a:ext cx="1408176" cy="1182624"/>
+            <a:off x="5385816" y="2103120"/>
+            <a:ext cx="1389888" cy="1185672"/>
           </a:xfrm>
           <a:prstGeom prst="rect">
             <a:avLst/>
@@ -8542,7 +8542,7 @@
         </p:nvSpPr>
         <p:spPr>
           <a:xfrm>
-            <a:off x="1828800" y="3560063"/>
+            <a:off x="1828800" y="3563112"/>
             <a:ext cx="8503920" cy="548640"/>
           </a:xfrm>
           <a:prstGeom prst="rect">
@@ -9271,7 +9271,7 @@
       </p:sp>
       <p:pic>
         <p:nvPicPr>
-          <p:cNvPr id="9" name="Picture 8" descr="a8fa097f61cf2d4e.png"/>
+          <p:cNvPr id="9" name="Picture 8" descr="e041e4b255d1e34c.png"/>
           <p:cNvPicPr>
             <a:picLocks noChangeAspect="1"/>
           </p:cNvPicPr>
@@ -9286,7 +9286,7 @@
         <p:spPr>
           <a:xfrm>
             <a:off x="5280659" y="2103120"/>
-            <a:ext cx="1600200" cy="1021080"/>
+            <a:ext cx="1600200" cy="1018032"/>
           </a:xfrm>
           <a:prstGeom prst="rect">
             <a:avLst/>
@@ -9301,7 +9301,7 @@
         </p:nvSpPr>
         <p:spPr>
           <a:xfrm>
-            <a:off x="1828800" y="3398519"/>
+            <a:off x="1828800" y="3395471"/>
             <a:ext cx="8503920" cy="548640"/>
           </a:xfrm>
           <a:prstGeom prst="rect">
@@ -10188,7 +10188,7 @@
       </p:sp>
       <p:pic>
         <p:nvPicPr>
-          <p:cNvPr id="9" name="Picture 8" descr="639a6b0d53b4323e.png"/>
+          <p:cNvPr id="9" name="Picture 8" descr="c78ed1ad0d5dedd3.png"/>
           <p:cNvPicPr>
             <a:picLocks noChangeAspect="1"/>
           </p:cNvPicPr>
@@ -10202,8 +10202,8 @@
         </p:blipFill>
         <p:spPr>
           <a:xfrm>
-            <a:off x="4998719" y="2103120"/>
-            <a:ext cx="2164080" cy="1094232"/>
+            <a:off x="5009387" y="2103120"/>
+            <a:ext cx="2142744" cy="1094232"/>
           </a:xfrm>
           <a:prstGeom prst="rect">
             <a:avLst/>
@@ -11335,7 +11335,7 @@
       </p:sp>
       <p:pic>
         <p:nvPicPr>
-          <p:cNvPr id="9" name="Picture 8" descr="fb0746628bca84a4.png"/>
+          <p:cNvPr id="9" name="Picture 8" descr="916206a62c8d46a5.png"/>
           <p:cNvPicPr>
             <a:picLocks noChangeAspect="1"/>
           </p:cNvPicPr>
@@ -11349,8 +11349,8 @@
         </p:blipFill>
         <p:spPr>
           <a:xfrm>
-            <a:off x="5068824" y="2103120"/>
-            <a:ext cx="2023872" cy="1005840"/>
+            <a:off x="5074919" y="2103120"/>
+            <a:ext cx="2011680" cy="1005840"/>
           </a:xfrm>
           <a:prstGeom prst="rect">
             <a:avLst/>
@@ -12306,7 +12306,7 @@
       </p:sp>
       <p:pic>
         <p:nvPicPr>
-          <p:cNvPr id="9" name="Picture 8" descr="2a624714308fb26a.png"/>
+          <p:cNvPr id="9" name="Picture 8" descr="51f9e7dda47d9701.png"/>
           <p:cNvPicPr>
             <a:picLocks noChangeAspect="1"/>
           </p:cNvPicPr>
@@ -12321,7 +12321,7 @@
         <p:spPr>
           <a:xfrm>
             <a:off x="4838699" y="2103120"/>
-            <a:ext cx="2484120" cy="515112"/>
+            <a:ext cx="2484120" cy="518160"/>
           </a:xfrm>
           <a:prstGeom prst="rect">
             <a:avLst/>
@@ -12336,7 +12336,7 @@
         </p:nvSpPr>
         <p:spPr>
           <a:xfrm>
-            <a:off x="1828800" y="2892552"/>
+            <a:off x="1828800" y="2895599"/>
             <a:ext cx="8503920" cy="548640"/>
           </a:xfrm>
           <a:prstGeom prst="rect">
@@ -13739,7 +13739,7 @@
       </p:sp>
       <p:pic>
         <p:nvPicPr>
-          <p:cNvPr id="9" name="Picture 8" descr="adbcd6f49d73f424.png"/>
+          <p:cNvPr id="9" name="Picture 8" descr="c2f375830fedead4.png"/>
           <p:cNvPicPr>
             <a:picLocks noChangeAspect="1"/>
           </p:cNvPicPr>
@@ -13753,8 +13753,8 @@
         </p:blipFill>
         <p:spPr>
           <a:xfrm>
-            <a:off x="4776215" y="2103120"/>
-            <a:ext cx="2609088" cy="1182624"/>
+            <a:off x="4786883" y="2103120"/>
+            <a:ext cx="2587752" cy="1185672"/>
           </a:xfrm>
           <a:prstGeom prst="rect">
             <a:avLst/>
@@ -13769,7 +13769,7 @@
         </p:nvSpPr>
         <p:spPr>
           <a:xfrm>
-            <a:off x="1828800" y="3560063"/>
+            <a:off x="1828800" y="3563112"/>
             <a:ext cx="8503920" cy="548640"/>
           </a:xfrm>
           <a:prstGeom prst="rect">
@@ -14641,7 +14641,7 @@
         </p:nvSpPr>
         <p:spPr>
           <a:xfrm>
-            <a:off x="1176876" y="2276856"/>
+            <a:off x="1178400" y="2276856"/>
             <a:ext cx="2867900" cy="457200"/>
           </a:xfrm>
           <a:prstGeom prst="rect">
@@ -14670,7 +14670,7 @@
       </p:sp>
       <p:pic>
         <p:nvPicPr>
-          <p:cNvPr id="10" name="Picture 9" descr="7eecc4c6e0dafa56.png"/>
+          <p:cNvPr id="10" name="Picture 9" descr="7499f9d1d2ab2e70.png"/>
           <p:cNvPicPr>
             <a:picLocks noChangeAspect="1"/>
           </p:cNvPicPr>
@@ -14684,8 +14684,8 @@
         </p:blipFill>
         <p:spPr>
           <a:xfrm>
-            <a:off x="3907616" y="2103120"/>
-            <a:ext cx="2185416" cy="804672"/>
+            <a:off x="3909140" y="2103120"/>
+            <a:ext cx="2188464" cy="804672"/>
           </a:xfrm>
           <a:prstGeom prst="rect">
             <a:avLst/>
@@ -14700,7 +14700,7 @@
         </p:nvSpPr>
         <p:spPr>
           <a:xfrm>
-            <a:off x="6093032" y="2276856"/>
+            <a:off x="6097604" y="2276856"/>
             <a:ext cx="2925902" cy="457200"/>
           </a:xfrm>
           <a:prstGeom prst="rect">
@@ -14729,7 +14729,7 @@
       </p:sp>
       <p:pic>
         <p:nvPicPr>
-          <p:cNvPr id="12" name="Picture 11" descr="d5013e6d72f4d514.png"/>
+          <p:cNvPr id="12" name="Picture 11" descr="dc00211af1d70f1b.png"/>
           <p:cNvPicPr>
             <a:picLocks noChangeAspect="1"/>
           </p:cNvPicPr>
@@ -14743,8 +14743,8 @@
         </p:blipFill>
         <p:spPr>
           <a:xfrm>
-            <a:off x="8881775" y="2103120"/>
-            <a:ext cx="1932432" cy="804672"/>
+            <a:off x="8886347" y="2103120"/>
+            <a:ext cx="1926335" cy="804672"/>
           </a:xfrm>
           <a:prstGeom prst="rect">
             <a:avLst/>
@@ -14759,7 +14759,7 @@
         </p:nvSpPr>
         <p:spPr>
           <a:xfrm>
-            <a:off x="10814207" y="2276856"/>
+            <a:off x="10812683" y="2276856"/>
             <a:ext cx="307595" cy="457200"/>
           </a:xfrm>
           <a:prstGeom prst="rect">
@@ -18301,7 +18301,7 @@
         </p:nvSpPr>
         <p:spPr>
           <a:xfrm>
-            <a:off x="3332085" y="2514600"/>
+            <a:off x="3330561" y="2514600"/>
             <a:ext cx="1854989" cy="457200"/>
           </a:xfrm>
           <a:prstGeom prst="rect">
@@ -18330,7 +18330,7 @@
       </p:sp>
       <p:pic>
         <p:nvPicPr>
-          <p:cNvPr id="12" name="Picture 11" descr="e5535b5cffe51469.png"/>
+          <p:cNvPr id="12" name="Picture 11" descr="2d268109f28c9abf.png"/>
           <p:cNvPicPr>
             <a:picLocks noChangeAspect="1"/>
           </p:cNvPicPr>
@@ -18344,8 +18344,8 @@
         </p:blipFill>
         <p:spPr>
           <a:xfrm>
-            <a:off x="5049914" y="2340864"/>
-            <a:ext cx="3779520" cy="804672"/>
+            <a:off x="5048390" y="2340864"/>
+            <a:ext cx="3782568" cy="804672"/>
           </a:xfrm>
           <a:prstGeom prst="rect">
             <a:avLst/>
@@ -18360,7 +18360,7 @@
         </p:nvSpPr>
         <p:spPr>
           <a:xfrm>
-            <a:off x="2944565" y="3665219"/>
+            <a:off x="2943041" y="3663696"/>
             <a:ext cx="1621140" cy="457200"/>
           </a:xfrm>
           <a:prstGeom prst="rect">
@@ -18389,7 +18389,7 @@
       </p:sp>
       <p:pic>
         <p:nvPicPr>
-          <p:cNvPr id="14" name="Picture 13" descr="7055adc9101d4378.png"/>
+          <p:cNvPr id="14" name="Picture 13" descr="20e6fc4620e3ea78.png"/>
           <p:cNvPicPr>
             <a:picLocks noChangeAspect="1"/>
           </p:cNvPicPr>
@@ -18403,8 +18403,8 @@
         </p:blipFill>
         <p:spPr>
           <a:xfrm>
-            <a:off x="4428546" y="3419856"/>
-            <a:ext cx="4788408" cy="947928"/>
+            <a:off x="4427022" y="3419856"/>
+            <a:ext cx="4791456" cy="944880"/>
           </a:xfrm>
           <a:prstGeom prst="rect">
             <a:avLst/>
@@ -18419,7 +18419,7 @@
         </p:nvSpPr>
         <p:spPr>
           <a:xfrm>
-            <a:off x="987552" y="4706112"/>
+            <a:off x="987552" y="4703064"/>
             <a:ext cx="10131551" cy="475488"/>
           </a:xfrm>
           <a:prstGeom prst="rect">
@@ -19026,7 +19026,7 @@
       </p:sp>
       <p:pic>
         <p:nvPicPr>
-          <p:cNvPr id="18" name="Picture 17" descr="f1f6a9f3d40cc3d7.png"/>
+          <p:cNvPr id="18" name="Picture 17" descr="b0973f9ba7881b29.png"/>
           <p:cNvPicPr>
             <a:picLocks noChangeAspect="1"/>
           </p:cNvPicPr>
@@ -19085,7 +19085,7 @@
       </p:sp>
       <p:pic>
         <p:nvPicPr>
-          <p:cNvPr id="20" name="Picture 19" descr="ae5b0572c4324ddf.png"/>
+          <p:cNvPr id="20" name="Picture 19" descr="c3382604741c4038.png"/>
           <p:cNvPicPr>
             <a:picLocks noChangeAspect="1"/>
           </p:cNvPicPr>
@@ -19729,7 +19729,7 @@
       </p:sp>
       <p:pic>
         <p:nvPicPr>
-          <p:cNvPr id="9" name="Picture 8" descr="593c79a22248f7e1.png"/>
+          <p:cNvPr id="9" name="Picture 8" descr="cfcc880844c57bbb.png"/>
           <p:cNvPicPr>
             <a:picLocks noChangeAspect="1"/>
           </p:cNvPicPr>
@@ -19744,7 +19744,7 @@
         <p:spPr>
           <a:xfrm>
             <a:off x="1828800" y="1920240"/>
-            <a:ext cx="3044952" cy="804672"/>
+            <a:ext cx="3026664" cy="804672"/>
           </a:xfrm>
           <a:prstGeom prst="rect">
             <a:avLst/>
@@ -19759,8 +19759,8 @@
         </p:nvSpPr>
         <p:spPr>
           <a:xfrm>
-            <a:off x="5330952" y="2093976"/>
-            <a:ext cx="6053327" cy="502920"/>
+            <a:off x="5312664" y="2093976"/>
+            <a:ext cx="6071615" cy="502920"/>
           </a:xfrm>
           <a:prstGeom prst="rect">
             <a:avLst/>
@@ -19788,7 +19788,7 @@
       </p:sp>
       <p:pic>
         <p:nvPicPr>
-          <p:cNvPr id="11" name="Picture 10" descr="fdbf4bf677431cad.png"/>
+          <p:cNvPr id="11" name="Picture 10" descr="4c8aa7fdd39a6875.png"/>
           <p:cNvPicPr>
             <a:picLocks noChangeAspect="1"/>
           </p:cNvPicPr>
@@ -19803,7 +19803,7 @@
         <p:spPr>
           <a:xfrm>
             <a:off x="1828800" y="2999232"/>
-            <a:ext cx="3060192" cy="804672"/>
+            <a:ext cx="3041904" cy="804672"/>
           </a:xfrm>
           <a:prstGeom prst="rect">
             <a:avLst/>
@@ -19818,8 +19818,8 @@
         </p:nvSpPr>
         <p:spPr>
           <a:xfrm>
-            <a:off x="5346192" y="3172968"/>
-            <a:ext cx="6038087" cy="502920"/>
+            <a:off x="5327904" y="3172968"/>
+            <a:ext cx="6056376" cy="502920"/>
           </a:xfrm>
           <a:prstGeom prst="rect">
             <a:avLst/>
@@ -19847,7 +19847,7 @@
       </p:sp>
       <p:pic>
         <p:nvPicPr>
-          <p:cNvPr id="13" name="Picture 12" descr="3d9d3a4be89fd9bd.png"/>
+          <p:cNvPr id="13" name="Picture 12" descr="8fb9fcec01a757f9.png"/>
           <p:cNvPicPr>
             <a:picLocks noChangeAspect="1"/>
           </p:cNvPicPr>
@@ -19862,7 +19862,7 @@
         <p:spPr>
           <a:xfrm>
             <a:off x="1828800" y="4078224"/>
-            <a:ext cx="1993392" cy="804672"/>
+            <a:ext cx="1981199" cy="804672"/>
           </a:xfrm>
           <a:prstGeom prst="rect">
             <a:avLst/>
@@ -19877,7 +19877,7 @@
         </p:nvSpPr>
         <p:spPr>
           <a:xfrm>
-            <a:off x="4279392" y="4251960"/>
+            <a:off x="4267199" y="4251960"/>
             <a:ext cx="6400800" cy="502920"/>
           </a:xfrm>
           <a:prstGeom prst="rect">

--- a/a7/build/out/u3/A7 3.03  Slides.pptx
+++ b/a7/build/out/u3/A7 3.03  Slides.pptx
@@ -9742,7 +9742,7 @@
                 </a:solidFill>
                 <a:latin typeface="Century Schoolbook"/>
               </a:rPr>
-              <a:t>4</a:t>
+              <a:t>1/4</a:t>
             </a:r>
           </a:p>
         </p:txBody>
@@ -9883,7 +9883,7 @@
                 </a:solidFill>
                 <a:latin typeface="Century Schoolbook"/>
               </a:rPr>
-              <a:t>1/4</a:t>
+              <a:t>4</a:t>
             </a:r>
           </a:p>
         </p:txBody>
@@ -10271,20 +10271,20 @@
             <a:r>
               <a:rPr sz="2400" b="1" i="0">
                 <a:solidFill>
-                  <a:srgbClr val="9E1B32"/>
+                  <a:srgbClr val="1A1A1A"/>
                 </a:solidFill>
                 <a:latin typeface="Century Schoolbook"/>
               </a:rPr>
               <a:t>A.   </a:t>
             </a:r>
             <a:r>
-              <a:rPr sz="2400" b="1" i="0">
-                <a:solidFill>
-                  <a:srgbClr val="9E1B32"/>
-                </a:solidFill>
-                <a:latin typeface="Century Schoolbook"/>
-              </a:rPr>
-              <a:t>4</a:t>
+              <a:rPr sz="2400" b="0" i="0">
+                <a:solidFill>
+                  <a:srgbClr val="1A1A1A"/>
+                </a:solidFill>
+                <a:latin typeface="Century Schoolbook"/>
+              </a:rPr>
+              <a:t>1/4</a:t>
             </a:r>
           </a:p>
         </p:txBody>
@@ -10412,20 +10412,20 @@
             <a:r>
               <a:rPr sz="2400" b="1" i="0">
                 <a:solidFill>
-                  <a:srgbClr val="1A1A1A"/>
+                  <a:srgbClr val="9E1B32"/>
                 </a:solidFill>
                 <a:latin typeface="Century Schoolbook"/>
               </a:rPr>
               <a:t>D.   </a:t>
             </a:r>
             <a:r>
-              <a:rPr sz="2400" b="0" i="0">
-                <a:solidFill>
-                  <a:srgbClr val="1A1A1A"/>
-                </a:solidFill>
-                <a:latin typeface="Century Schoolbook"/>
-              </a:rPr>
-              <a:t>1/4</a:t>
+              <a:rPr sz="2400" b="1" i="0">
+                <a:solidFill>
+                  <a:srgbClr val="9E1B32"/>
+                </a:solidFill>
+                <a:latin typeface="Century Schoolbook"/>
+              </a:rPr>
+              <a:t>4</a:t>
             </a:r>
           </a:p>
         </p:txBody>
@@ -10460,7 +10460,7 @@
                 </a:solidFill>
                 <a:latin typeface="Century Schoolbook"/>
               </a:rPr>
-              <a:t>Answer:   A — 4</a:t>
+              <a:t>Answer:   D — 4</a:t>
             </a:r>
           </a:p>
         </p:txBody>
@@ -10826,7 +10826,7 @@
                 </a:solidFill>
                 <a:latin typeface="Century Schoolbook"/>
               </a:rPr>
-              <a:t>0.1</a:t>
+              <a:t>0.2</a:t>
             </a:r>
             <a:r>
               <a:rPr sz="2400" b="0" i="0" baseline="30000">
@@ -10835,7 +10835,25 @@
                 </a:solidFill>
                 <a:latin typeface="Century Schoolbook"/>
               </a:rPr>
-              <a:t>5</a:t>
+              <a:t>0</a:t>
+            </a:r>
+            <a:r>
+              <a:rPr sz="2400" b="0" i="0">
+                <a:solidFill>
+                  <a:srgbClr val="1A1A1A"/>
+                </a:solidFill>
+                <a:latin typeface="Century Schoolbook"/>
+              </a:rPr>
+              <a:t> · 0.1</a:t>
+            </a:r>
+            <a:r>
+              <a:rPr sz="2400" b="0" i="0" baseline="30000">
+                <a:solidFill>
+                  <a:srgbClr val="1A1A1A"/>
+                </a:solidFill>
+                <a:latin typeface="Century Schoolbook"/>
+              </a:rPr>
+              <a:t>2</a:t>
             </a:r>
           </a:p>
         </p:txBody>
@@ -10888,7 +10906,7 @@
                 </a:solidFill>
                 <a:latin typeface="Century Schoolbook"/>
               </a:rPr>
-              <a:t>0</a:t>
+              <a:t>3</a:t>
             </a:r>
             <a:r>
               <a:rPr sz="2400" b="0" i="0">
@@ -10959,7 +10977,7 @@
                 </a:solidFill>
                 <a:latin typeface="Century Schoolbook"/>
               </a:rPr>
-              <a:t>6</a:t>
+              <a:t>5</a:t>
             </a:r>
           </a:p>
         </p:txBody>
@@ -11003,7 +11021,7 @@
                 </a:solidFill>
                 <a:latin typeface="Century Schoolbook"/>
               </a:rPr>
-              <a:t>0.2</a:t>
+              <a:t>0.1</a:t>
             </a:r>
             <a:r>
               <a:rPr sz="2400" b="0" i="0" baseline="30000">
@@ -11012,25 +11030,7 @@
                 </a:solidFill>
                 <a:latin typeface="Century Schoolbook"/>
               </a:rPr>
-              <a:t>3</a:t>
-            </a:r>
-            <a:r>
-              <a:rPr sz="2400" b="0" i="0">
-                <a:solidFill>
-                  <a:srgbClr val="1A1A1A"/>
-                </a:solidFill>
-                <a:latin typeface="Century Schoolbook"/>
-              </a:rPr>
-              <a:t> · 0.1</a:t>
-            </a:r>
-            <a:r>
-              <a:rPr sz="2400" b="0" i="0" baseline="30000">
-                <a:solidFill>
-                  <a:srgbClr val="1A1A1A"/>
-                </a:solidFill>
-                <a:latin typeface="Century Schoolbook"/>
-              </a:rPr>
-              <a:t>2</a:t>
+              <a:t>6</a:t>
             </a:r>
           </a:p>
         </p:txBody>
@@ -11418,29 +11418,47 @@
             <a:r>
               <a:rPr sz="2400" b="1" i="0">
                 <a:solidFill>
-                  <a:srgbClr val="9E1B32"/>
+                  <a:srgbClr val="1A1A1A"/>
                 </a:solidFill>
                 <a:latin typeface="Century Schoolbook"/>
               </a:rPr>
               <a:t>A.   </a:t>
             </a:r>
             <a:r>
-              <a:rPr sz="2400" b="1" i="0">
-                <a:solidFill>
-                  <a:srgbClr val="9E1B32"/>
-                </a:solidFill>
-                <a:latin typeface="Century Schoolbook"/>
-              </a:rPr>
-              <a:t>0.1</a:t>
-            </a:r>
-            <a:r>
-              <a:rPr sz="2400" b="1" i="0" baseline="30000">
-                <a:solidFill>
-                  <a:srgbClr val="9E1B32"/>
-                </a:solidFill>
-                <a:latin typeface="Century Schoolbook"/>
-              </a:rPr>
-              <a:t>5</a:t>
+              <a:rPr sz="2400" b="0" i="0">
+                <a:solidFill>
+                  <a:srgbClr val="1A1A1A"/>
+                </a:solidFill>
+                <a:latin typeface="Century Schoolbook"/>
+              </a:rPr>
+              <a:t>0.2</a:t>
+            </a:r>
+            <a:r>
+              <a:rPr sz="2400" b="0" i="0" baseline="30000">
+                <a:solidFill>
+                  <a:srgbClr val="1A1A1A"/>
+                </a:solidFill>
+                <a:latin typeface="Century Schoolbook"/>
+              </a:rPr>
+              <a:t>0</a:t>
+            </a:r>
+            <a:r>
+              <a:rPr sz="2400" b="0" i="0">
+                <a:solidFill>
+                  <a:srgbClr val="1A1A1A"/>
+                </a:solidFill>
+                <a:latin typeface="Century Schoolbook"/>
+              </a:rPr>
+              <a:t> · 0.1</a:t>
+            </a:r>
+            <a:r>
+              <a:rPr sz="2400" b="0" i="0" baseline="30000">
+                <a:solidFill>
+                  <a:srgbClr val="1A1A1A"/>
+                </a:solidFill>
+                <a:latin typeface="Century Schoolbook"/>
+              </a:rPr>
+              <a:t>2</a:t>
             </a:r>
           </a:p>
         </p:txBody>
@@ -11493,7 +11511,7 @@
                 </a:solidFill>
                 <a:latin typeface="Century Schoolbook"/>
               </a:rPr>
-              <a:t>0</a:t>
+              <a:t>3</a:t>
             </a:r>
             <a:r>
               <a:rPr sz="2400" b="0" i="0">
@@ -11542,29 +11560,29 @@
             <a:r>
               <a:rPr sz="2400" b="1" i="0">
                 <a:solidFill>
-                  <a:srgbClr val="1A1A1A"/>
+                  <a:srgbClr val="9E1B32"/>
                 </a:solidFill>
                 <a:latin typeface="Century Schoolbook"/>
               </a:rPr>
               <a:t>C.   </a:t>
             </a:r>
             <a:r>
-              <a:rPr sz="2400" b="0" i="0">
-                <a:solidFill>
-                  <a:srgbClr val="1A1A1A"/>
+              <a:rPr sz="2400" b="1" i="0">
+                <a:solidFill>
+                  <a:srgbClr val="9E1B32"/>
                 </a:solidFill>
                 <a:latin typeface="Century Schoolbook"/>
               </a:rPr>
               <a:t>0.1</a:t>
             </a:r>
             <a:r>
-              <a:rPr sz="2400" b="0" i="0" baseline="30000">
-                <a:solidFill>
-                  <a:srgbClr val="1A1A1A"/>
-                </a:solidFill>
-                <a:latin typeface="Century Schoolbook"/>
-              </a:rPr>
-              <a:t>6</a:t>
+              <a:rPr sz="2400" b="1" i="0" baseline="30000">
+                <a:solidFill>
+                  <a:srgbClr val="9E1B32"/>
+                </a:solidFill>
+                <a:latin typeface="Century Schoolbook"/>
+              </a:rPr>
+              <a:t>5</a:t>
             </a:r>
           </a:p>
         </p:txBody>
@@ -11608,7 +11626,7 @@
                 </a:solidFill>
                 <a:latin typeface="Century Schoolbook"/>
               </a:rPr>
-              <a:t>0.2</a:t>
+              <a:t>0.1</a:t>
             </a:r>
             <a:r>
               <a:rPr sz="2400" b="0" i="0" baseline="30000">
@@ -11617,25 +11635,7 @@
                 </a:solidFill>
                 <a:latin typeface="Century Schoolbook"/>
               </a:rPr>
-              <a:t>3</a:t>
-            </a:r>
-            <a:r>
-              <a:rPr sz="2400" b="0" i="0">
-                <a:solidFill>
-                  <a:srgbClr val="1A1A1A"/>
-                </a:solidFill>
-                <a:latin typeface="Century Schoolbook"/>
-              </a:rPr>
-              <a:t> · 0.1</a:t>
-            </a:r>
-            <a:r>
-              <a:rPr sz="2400" b="0" i="0" baseline="30000">
-                <a:solidFill>
-                  <a:srgbClr val="1A1A1A"/>
-                </a:solidFill>
-                <a:latin typeface="Century Schoolbook"/>
-              </a:rPr>
-              <a:t>2</a:t>
+              <a:t>6</a:t>
             </a:r>
           </a:p>
         </p:txBody>
@@ -11670,7 +11670,7 @@
                 </a:solidFill>
                 <a:latin typeface="Century Schoolbook"/>
               </a:rPr>
-              <a:t>Answer:   A — 0.1</a:t>
+              <a:t>Answer:   C — 0.1</a:t>
             </a:r>
             <a:r>
               <a:rPr sz="3200" b="1" i="0" baseline="30000">

--- a/a7/build/out/u3/A7 3.03  Slides.pptx
+++ b/a7/build/out/u3/A7 3.03  Slides.pptx
@@ -5711,8 +5711,8 @@
         </p:nvSpPr>
         <p:spPr>
           <a:xfrm>
-            <a:off x="1543419" y="2171700"/>
-            <a:ext cx="3658371" cy="457200"/>
+            <a:off x="1234440" y="1851660"/>
+            <a:ext cx="3195668" cy="457200"/>
           </a:xfrm>
           <a:prstGeom prst="rect">
             <a:avLst/>
@@ -5727,20 +5727,20 @@
           <a:p>
             <a:pPr algn="l"/>
             <a:r>
-              <a:rPr sz="2600" b="0" i="0">
+              <a:rPr sz="2400" b="0" i="0">
                 <a:solidFill>
                   <a:srgbClr val="1A1A1A"/>
                 </a:solidFill>
                 <a:latin typeface="Century Schoolbook"/>
               </a:rPr>
-              <a:t>A spreadsheet holds  </a:t>
+              <a:t>A warehouse holds  </a:t>
             </a:r>
           </a:p>
         </p:txBody>
       </p:sp>
       <p:pic>
         <p:nvPicPr>
-          <p:cNvPr id="10" name="Picture 9" descr="a9a688dcb3598704.png"/>
+          <p:cNvPr id="10" name="Picture 9" descr="ef1987aeb6be68e4.png"/>
           <p:cNvPicPr>
             <a:picLocks noChangeAspect="1"/>
           </p:cNvPicPr>
@@ -5754,8 +5754,8 @@
         </p:blipFill>
         <p:spPr>
           <a:xfrm>
-            <a:off x="5064631" y="2228088"/>
-            <a:ext cx="935736" cy="344424"/>
+            <a:off x="4292948" y="1938527"/>
+            <a:ext cx="268224" cy="283464"/>
           </a:xfrm>
           <a:prstGeom prst="rect">
             <a:avLst/>
@@ -5770,8 +5770,8 @@
         </p:nvSpPr>
         <p:spPr>
           <a:xfrm>
-            <a:off x="6000367" y="2171700"/>
-            <a:ext cx="1733884" cy="457200"/>
+            <a:off x="4561172" y="1851660"/>
+            <a:ext cx="1769800" cy="457200"/>
           </a:xfrm>
           <a:prstGeom prst="rect">
             <a:avLst/>
@@ -5786,20 +5786,20 @@
           <a:p>
             <a:pPr algn="l"/>
             <a:r>
-              <a:rPr sz="2600" b="0" i="0">
+              <a:rPr sz="2400" b="0" i="0">
                 <a:solidFill>
                   <a:srgbClr val="1A1A1A"/>
                 </a:solidFill>
                 <a:latin typeface="Century Schoolbook"/>
               </a:rPr>
-              <a:t>  cells in  </a:t>
+              <a:t>  boxes in  </a:t>
             </a:r>
           </a:p>
         </p:txBody>
       </p:sp>
       <p:pic>
         <p:nvPicPr>
-          <p:cNvPr id="12" name="Picture 11" descr="2b46a8bae93fb0d7.png"/>
+          <p:cNvPr id="12" name="Picture 11" descr="bd667566e598f523.png"/>
           <p:cNvPicPr>
             <a:picLocks noChangeAspect="1"/>
           </p:cNvPicPr>
@@ -5813,8 +5813,8 @@
         </p:blipFill>
         <p:spPr>
           <a:xfrm>
-            <a:off x="7597091" y="2229612"/>
-            <a:ext cx="332232" cy="341376"/>
+            <a:off x="6193812" y="1940052"/>
+            <a:ext cx="268224" cy="280416"/>
           </a:xfrm>
           <a:prstGeom prst="rect">
             <a:avLst/>
@@ -5829,8 +5829,8 @@
         </p:nvSpPr>
         <p:spPr>
           <a:xfrm>
-            <a:off x="7929323" y="2171700"/>
-            <a:ext cx="2825936" cy="457200"/>
+            <a:off x="6462036" y="1851660"/>
+            <a:ext cx="2079373" cy="457200"/>
           </a:xfrm>
           <a:prstGeom prst="rect">
             <a:avLst/>
@@ -5845,13 +5845,13 @@
           <a:p>
             <a:pPr algn="l"/>
             <a:r>
-              <a:rPr sz="2600" b="0" i="0">
+              <a:rPr sz="2400" b="0" i="0">
                 <a:solidFill>
                   <a:srgbClr val="1A1A1A"/>
                 </a:solidFill>
                 <a:latin typeface="Century Schoolbook"/>
               </a:rPr>
-              <a:t>  equal columns.</a:t>
+              <a:t>  equal rows.</a:t>
             </a:r>
           </a:p>
         </p:txBody>
@@ -5864,29 +5864,29 @@
         </p:nvSpPr>
         <p:spPr>
           <a:xfrm>
-            <a:off x="777240" y="2880360"/>
-            <a:ext cx="10607040" cy="465151"/>
-          </a:xfrm>
-          <a:prstGeom prst="rect">
-            <a:avLst/>
-          </a:prstGeom>
-          <a:noFill/>
-        </p:spPr>
-        <p:txBody>
-          <a:bodyPr wrap="square" lIns="45720" rIns="45720" tIns="18288" bIns="18288" anchor="t">
-            <a:spAutoFit/>
-          </a:bodyPr>
-          <a:lstStyle/>
-          <a:p>
-            <a:pPr algn="ctr"/>
-            <a:r>
-              <a:rPr sz="2600" b="0" i="0">
+            <a:off x="1234440" y="2487168"/>
+            <a:ext cx="10058400" cy="429370"/>
+          </a:xfrm>
+          <a:prstGeom prst="rect">
+            <a:avLst/>
+          </a:prstGeom>
+          <a:noFill/>
+        </p:spPr>
+        <p:txBody>
+          <a:bodyPr wrap="square" lIns="45720" rIns="45720" tIns="18288" bIns="18288" anchor="t">
+            <a:spAutoFit/>
+          </a:bodyPr>
+          <a:lstStyle/>
+          <a:p>
+            <a:pPr algn="l"/>
+            <a:r>
+              <a:rPr sz="2400" b="0" i="0">
                 <a:solidFill>
                   <a:srgbClr val="1A1A1A"/>
                 </a:solidFill>
                 <a:latin typeface="Century Schoolbook"/>
               </a:rPr>
-              <a:t>The file is 3 megabytes.</a:t>
+              <a:t>Each box weighs 3 kilograms.</a:t>
             </a:r>
           </a:p>
         </p:txBody>
@@ -5899,29 +5899,29 @@
         </p:nvSpPr>
         <p:spPr>
           <a:xfrm>
-            <a:off x="777240" y="3455239"/>
-            <a:ext cx="10607040" cy="465151"/>
-          </a:xfrm>
-          <a:prstGeom prst="rect">
-            <a:avLst/>
-          </a:prstGeom>
-          <a:noFill/>
-        </p:spPr>
-        <p:txBody>
-          <a:bodyPr wrap="square" lIns="45720" rIns="45720" tIns="18288" bIns="18288" anchor="t">
-            <a:spAutoFit/>
-          </a:bodyPr>
-          <a:lstStyle/>
-          <a:p>
-            <a:pPr algn="ctr"/>
-            <a:r>
-              <a:rPr sz="2600" b="0" i="0">
+            <a:off x="1234440" y="3026266"/>
+            <a:ext cx="10058400" cy="429370"/>
+          </a:xfrm>
+          <a:prstGeom prst="rect">
+            <a:avLst/>
+          </a:prstGeom>
+          <a:noFill/>
+        </p:spPr>
+        <p:txBody>
+          <a:bodyPr wrap="square" lIns="45720" rIns="45720" tIns="18288" bIns="18288" anchor="t">
+            <a:spAutoFit/>
+          </a:bodyPr>
+          <a:lstStyle/>
+          <a:p>
+            <a:pPr algn="l"/>
+            <a:r>
+              <a:rPr sz="2400" b="1" i="0">
                 <a:solidFill>
                   <a:srgbClr val="1A1A1A"/>
                 </a:solidFill>
                 <a:latin typeface="Century Schoolbook"/>
               </a:rPr>
-              <a:t>How many cells are in each column?</a:t>
+              <a:t>How many boxes are in each row?</a:t>
             </a:r>
           </a:p>
         </p:txBody>
@@ -5957,41 +5957,6 @@
                 <a:latin typeface="Century Schoolbook"/>
               </a:rPr>
               <a:t>Answer it.</a:t>
-            </a:r>
-          </a:p>
-        </p:txBody>
-      </p:sp>
-      <p:sp>
-        <p:nvSpPr>
-          <p:cNvPr id="17" name="TextBox 16"/>
-          <p:cNvSpPr txBox="1"/>
-          <p:nvPr/>
-        </p:nvSpPr>
-        <p:spPr>
-          <a:xfrm>
-            <a:off x="777240" y="4828032"/>
-            <a:ext cx="10607040" cy="365760"/>
-          </a:xfrm>
-          <a:prstGeom prst="rect">
-            <a:avLst/>
-          </a:prstGeom>
-          <a:noFill/>
-        </p:spPr>
-        <p:txBody>
-          <a:bodyPr wrap="square" lIns="45720" rIns="45720" tIns="18288" bIns="18288" anchor="t">
-            <a:spAutoFit/>
-          </a:bodyPr>
-          <a:lstStyle/>
-          <a:p>
-            <a:pPr algn="ctr"/>
-            <a:r>
-              <a:rPr sz="1900" b="0" i="1">
-                <a:solidFill>
-                  <a:srgbClr val="6B6B6B"/>
-                </a:solidFill>
-                <a:latin typeface="Century Schoolbook"/>
-              </a:rPr>
-              <a:t>Find the value.</a:t>
             </a:r>
           </a:p>
         </p:txBody>
@@ -6267,8 +6232,8 @@
         </p:nvSpPr>
         <p:spPr>
           <a:xfrm>
-            <a:off x="1540371" y="2080260"/>
-            <a:ext cx="3658371" cy="457200"/>
+            <a:off x="1234440" y="1851660"/>
+            <a:ext cx="3195668" cy="457200"/>
           </a:xfrm>
           <a:prstGeom prst="rect">
             <a:avLst/>
@@ -6283,20 +6248,20 @@
           <a:p>
             <a:pPr algn="l"/>
             <a:r>
-              <a:rPr sz="2600" b="0" i="0">
+              <a:rPr sz="2400" b="0" i="0">
                 <a:solidFill>
                   <a:srgbClr val="1A1A1A"/>
                 </a:solidFill>
                 <a:latin typeface="Century Schoolbook"/>
               </a:rPr>
-              <a:t>A spreadsheet holds  </a:t>
+              <a:t>A warehouse holds  </a:t>
             </a:r>
           </a:p>
         </p:txBody>
       </p:sp>
       <p:pic>
         <p:nvPicPr>
-          <p:cNvPr id="10" name="Picture 9" descr="799e3e8272a315fb.png"/>
+          <p:cNvPr id="10" name="Picture 9" descr="08d825ede09be259.png"/>
           <p:cNvPicPr>
             <a:picLocks noChangeAspect="1"/>
           </p:cNvPicPr>
@@ -6310,8 +6275,8 @@
         </p:blipFill>
         <p:spPr>
           <a:xfrm>
-            <a:off x="5061583" y="2135124"/>
-            <a:ext cx="938784" cy="347472"/>
+            <a:off x="4292948" y="1940052"/>
+            <a:ext cx="271272" cy="280416"/>
           </a:xfrm>
           <a:prstGeom prst="rect">
             <a:avLst/>
@@ -6326,8 +6291,8 @@
         </p:nvSpPr>
         <p:spPr>
           <a:xfrm>
-            <a:off x="6000367" y="2080260"/>
-            <a:ext cx="1733884" cy="457200"/>
+            <a:off x="4564220" y="1851660"/>
+            <a:ext cx="1769800" cy="457200"/>
           </a:xfrm>
           <a:prstGeom prst="rect">
             <a:avLst/>
@@ -6342,20 +6307,20 @@
           <a:p>
             <a:pPr algn="l"/>
             <a:r>
-              <a:rPr sz="2600" b="0" i="0">
+              <a:rPr sz="2400" b="0" i="0">
                 <a:solidFill>
                   <a:srgbClr val="1A1A1A"/>
                 </a:solidFill>
                 <a:latin typeface="Century Schoolbook"/>
               </a:rPr>
-              <a:t>  cells in  </a:t>
+              <a:t>  boxes in  </a:t>
             </a:r>
           </a:p>
         </p:txBody>
       </p:sp>
       <p:pic>
         <p:nvPicPr>
-          <p:cNvPr id="12" name="Picture 11" descr="8616d6e97c2e53ba.png"/>
+          <p:cNvPr id="12" name="Picture 11" descr="e32dba3262b932bf.png"/>
           <p:cNvPicPr>
             <a:picLocks noChangeAspect="1"/>
           </p:cNvPicPr>
@@ -6369,8 +6334,8 @@
         </p:blipFill>
         <p:spPr>
           <a:xfrm>
-            <a:off x="7597091" y="2138171"/>
-            <a:ext cx="335280" cy="341376"/>
+            <a:off x="6196860" y="1940052"/>
+            <a:ext cx="268224" cy="280416"/>
           </a:xfrm>
           <a:prstGeom prst="rect">
             <a:avLst/>
@@ -6385,8 +6350,8 @@
         </p:nvSpPr>
         <p:spPr>
           <a:xfrm>
-            <a:off x="7932371" y="2080260"/>
-            <a:ext cx="2825936" cy="457200"/>
+            <a:off x="6465084" y="1851660"/>
+            <a:ext cx="2079373" cy="457200"/>
           </a:xfrm>
           <a:prstGeom prst="rect">
             <a:avLst/>
@@ -6401,13 +6366,13 @@
           <a:p>
             <a:pPr algn="l"/>
             <a:r>
-              <a:rPr sz="2600" b="0" i="0">
+              <a:rPr sz="2400" b="0" i="0">
                 <a:solidFill>
                   <a:srgbClr val="1A1A1A"/>
                 </a:solidFill>
                 <a:latin typeface="Century Schoolbook"/>
               </a:rPr>
-              <a:t>  equal columns.</a:t>
+              <a:t>  equal rows.</a:t>
             </a:r>
           </a:p>
         </p:txBody>
@@ -6420,8 +6385,78 @@
         </p:nvSpPr>
         <p:spPr>
           <a:xfrm>
-            <a:off x="777240" y="2788920"/>
-            <a:ext cx="10607040" cy="465151"/>
+            <a:off x="1234440" y="2487168"/>
+            <a:ext cx="10058400" cy="429370"/>
+          </a:xfrm>
+          <a:prstGeom prst="rect">
+            <a:avLst/>
+          </a:prstGeom>
+          <a:noFill/>
+        </p:spPr>
+        <p:txBody>
+          <a:bodyPr wrap="square" lIns="45720" rIns="45720" tIns="18288" bIns="18288" anchor="t">
+            <a:spAutoFit/>
+          </a:bodyPr>
+          <a:lstStyle/>
+          <a:p>
+            <a:pPr algn="l"/>
+            <a:r>
+              <a:rPr sz="2400" b="0" i="0">
+                <a:solidFill>
+                  <a:srgbClr val="1A1A1A"/>
+                </a:solidFill>
+                <a:latin typeface="Century Schoolbook"/>
+              </a:rPr>
+              <a:t>Each box weighs 3 kilograms.</a:t>
+            </a:r>
+          </a:p>
+        </p:txBody>
+      </p:sp>
+      <p:sp>
+        <p:nvSpPr>
+          <p:cNvPr id="15" name="TextBox 14"/>
+          <p:cNvSpPr txBox="1"/>
+          <p:nvPr/>
+        </p:nvSpPr>
+        <p:spPr>
+          <a:xfrm>
+            <a:off x="1234440" y="3026266"/>
+            <a:ext cx="10058400" cy="429370"/>
+          </a:xfrm>
+          <a:prstGeom prst="rect">
+            <a:avLst/>
+          </a:prstGeom>
+          <a:noFill/>
+        </p:spPr>
+        <p:txBody>
+          <a:bodyPr wrap="square" lIns="45720" rIns="45720" tIns="18288" bIns="18288" anchor="t">
+            <a:spAutoFit/>
+          </a:bodyPr>
+          <a:lstStyle/>
+          <a:p>
+            <a:pPr algn="l"/>
+            <a:r>
+              <a:rPr sz="2400" b="1" i="0">
+                <a:solidFill>
+                  <a:srgbClr val="1A1A1A"/>
+                </a:solidFill>
+                <a:latin typeface="Century Schoolbook"/>
+              </a:rPr>
+              <a:t>How many boxes are in each row?</a:t>
+            </a:r>
+          </a:p>
+        </p:txBody>
+      </p:sp>
+      <p:sp>
+        <p:nvSpPr>
+          <p:cNvPr id="16" name="TextBox 15"/>
+          <p:cNvSpPr txBox="1"/>
+          <p:nvPr/>
+        </p:nvSpPr>
+        <p:spPr>
+          <a:xfrm>
+            <a:off x="1828800" y="3656804"/>
+            <a:ext cx="8503920" cy="548640"/>
           </a:xfrm>
           <a:prstGeom prst="rect">
             <a:avLst/>
@@ -6436,76 +6471,6 @@
           <a:p>
             <a:pPr algn="ctr"/>
             <a:r>
-              <a:rPr sz="2600" b="0" i="0">
-                <a:solidFill>
-                  <a:srgbClr val="1A1A1A"/>
-                </a:solidFill>
-                <a:latin typeface="Century Schoolbook"/>
-              </a:rPr>
-              <a:t>The file is 3 megabytes.</a:t>
-            </a:r>
-          </a:p>
-        </p:txBody>
-      </p:sp>
-      <p:sp>
-        <p:nvSpPr>
-          <p:cNvPr id="15" name="TextBox 14"/>
-          <p:cNvSpPr txBox="1"/>
-          <p:nvPr/>
-        </p:nvSpPr>
-        <p:spPr>
-          <a:xfrm>
-            <a:off x="777240" y="3363799"/>
-            <a:ext cx="10607040" cy="465151"/>
-          </a:xfrm>
-          <a:prstGeom prst="rect">
-            <a:avLst/>
-          </a:prstGeom>
-          <a:noFill/>
-        </p:spPr>
-        <p:txBody>
-          <a:bodyPr wrap="square" lIns="45720" rIns="45720" tIns="18288" bIns="18288" anchor="t">
-            <a:spAutoFit/>
-          </a:bodyPr>
-          <a:lstStyle/>
-          <a:p>
-            <a:pPr algn="ctr"/>
-            <a:r>
-              <a:rPr sz="2600" b="0" i="0">
-                <a:solidFill>
-                  <a:srgbClr val="1A1A1A"/>
-                </a:solidFill>
-                <a:latin typeface="Century Schoolbook"/>
-              </a:rPr>
-              <a:t>How many cells are in each column?</a:t>
-            </a:r>
-          </a:p>
-        </p:txBody>
-      </p:sp>
-      <p:sp>
-        <p:nvSpPr>
-          <p:cNvPr id="16" name="TextBox 15"/>
-          <p:cNvSpPr txBox="1"/>
-          <p:nvPr/>
-        </p:nvSpPr>
-        <p:spPr>
-          <a:xfrm>
-            <a:off x="1828800" y="3984398"/>
-            <a:ext cx="8503920" cy="548640"/>
-          </a:xfrm>
-          <a:prstGeom prst="rect">
-            <a:avLst/>
-          </a:prstGeom>
-          <a:noFill/>
-        </p:spPr>
-        <p:txBody>
-          <a:bodyPr wrap="square" lIns="45720" rIns="45720" tIns="18288" bIns="18288" anchor="t">
-            <a:spAutoFit/>
-          </a:bodyPr>
-          <a:lstStyle/>
-          <a:p>
-            <a:pPr algn="ctr"/>
-            <a:r>
               <a:rPr sz="2400" b="0" i="0">
                 <a:solidFill>
                   <a:srgbClr val="6B6B6B"/>
@@ -6530,7 +6495,7 @@
                 </a:solidFill>
                 <a:latin typeface="Century Schoolbook"/>
               </a:rPr>
-              <a:t> · 1 over 6</a:t>
+              <a:t> over 6</a:t>
             </a:r>
             <a:r>
               <a:rPr sz="2400" b="0" i="0" baseline="30000">
@@ -6570,7 +6535,7 @@
         </p:nvSpPr>
         <p:spPr>
           <a:xfrm>
-            <a:off x="777240" y="4715918"/>
+            <a:off x="777240" y="4663440"/>
             <a:ext cx="10607040" cy="548640"/>
           </a:xfrm>
           <a:prstGeom prst="rect">

--- a/a7/build/out/u3/A7 3.03  Slides.pptx
+++ b/a7/build/out/u3/A7 3.03  Slides.pptx
@@ -3442,7 +3442,7 @@
                 </a:solidFill>
                 <a:latin typeface="Century Schoolbook"/>
               </a:rPr>
-              <a:t>Today: two or three laws in one expression — and the order is yours.</a:t>
+              <a:t>Today: several laws in one expression — the order is yours.</a:t>
             </a:r>
           </a:p>
         </p:txBody>
